--- a/docs/decode-kv-pool.pptx
+++ b/docs/decode-kv-pool.pptx
@@ -9,7 +9,6 @@
     <p:sldId id="257" r:id="rId8"/>
     <p:sldId id="258" r:id="rId9"/>
     <p:sldId id="259" r:id="rId10"/>
-    <p:sldId id="260" r:id="rId11"/>
   </p:sldIdLst>
   <p:sldSz cx="12191999" cy="6858000" type="screen4x3"/>
   <p:notesSz cx="6858000" cy="9144000"/>
@@ -3092,30 +3091,1204 @@
         <p:nvPr/>
       </p:nvGrpSpPr>
       <p:grpSpPr/>
-      <p:pic>
-        <p:nvPicPr>
-          <p:cNvPr id="2" name="Picture 1" descr="01.png"/>
-          <p:cNvPicPr>
-            <a:picLocks noChangeAspect="1"/>
-          </p:cNvPicPr>
-          <p:nvPr/>
-        </p:nvPicPr>
-        <p:blipFill>
-          <a:blip r:embed="rId2"/>
-          <a:stretch>
-            <a:fillRect/>
-          </a:stretch>
-        </p:blipFill>
+      <p:sp>
+        <p:nvSpPr>
+          <p:cNvPr id="2" name="Rectangle 1"/>
+          <p:cNvSpPr/>
+          <p:nvPr/>
+        </p:nvSpPr>
         <p:spPr>
           <a:xfrm>
             <a:off x="0" y="0"/>
-            <a:ext cx="12191999" cy="6858000"/>
-          </a:xfrm>
-          <a:prstGeom prst="rect">
-            <a:avLst/>
-          </a:prstGeom>
-        </p:spPr>
-      </p:pic>
+            <a:ext cx="12191999" cy="73152"/>
+          </a:xfrm>
+          <a:prstGeom prst="rect">
+            <a:avLst/>
+          </a:prstGeom>
+          <a:solidFill>
+            <a:srgbClr val="0E4A8A"/>
+          </a:solidFill>
+          <a:ln>
+            <a:noFill/>
+          </a:ln>
+        </p:spPr>
+        <p:style>
+          <a:lnRef idx="1">
+            <a:schemeClr val="accent1"/>
+          </a:lnRef>
+          <a:fillRef idx="3">
+            <a:schemeClr val="accent1"/>
+          </a:fillRef>
+          <a:effectRef idx="2">
+            <a:schemeClr val="accent1"/>
+          </a:effectRef>
+          <a:fontRef idx="minor">
+            <a:schemeClr val="lt1"/>
+          </a:fontRef>
+        </p:style>
+        <p:txBody>
+          <a:bodyPr rtlCol="0" anchor="ctr"/>
+          <a:lstStyle/>
+          <a:p>
+            <a:pPr algn="ctr"/>
+          </a:p>
+        </p:txBody>
+      </p:sp>
+      <p:sp>
+        <p:nvSpPr>
+          <p:cNvPr id="3" name="TextBox 2"/>
+          <p:cNvSpPr txBox="1"/>
+          <p:nvPr/>
+        </p:nvSpPr>
+        <p:spPr>
+          <a:xfrm>
+            <a:off x="438912" y="146304"/>
+            <a:ext cx="10972800" cy="256032"/>
+          </a:xfrm>
+          <a:prstGeom prst="rect">
+            <a:avLst/>
+          </a:prstGeom>
+          <a:noFill/>
+        </p:spPr>
+        <p:txBody>
+          <a:bodyPr wrap="square" lIns="18288" rIns="18288" tIns="18288" bIns="18288" anchor="ctr"/>
+          <a:lstStyle/>
+          <a:p>
+            <a:pPr algn="l">
+              <a:lnSpc>
+                <a:spcPct val="105000"/>
+              </a:lnSpc>
+              <a:spcBef>
+                <a:spcPts val="0"/>
+              </a:spcBef>
+              <a:spcAft>
+                <a:spcPts val="200"/>
+              </a:spcAft>
+            </a:pPr>
+            <a:r>
+              <a:rPr sz="1300" b="1">
+                <a:solidFill>
+                  <a:srgbClr val="0E4A8A"/>
+                </a:solidFill>
+                <a:latin typeface="Microsoft YaHei"/>
+                <a:ea typeface="Microsoft YaHei"/>
+                <a:cs typeface="Microsoft YaHei"/>
+              </a:rPr>
+              <a:t>结论</a:t>
+            </a:r>
+          </a:p>
+        </p:txBody>
+      </p:sp>
+      <p:sp>
+        <p:nvSpPr>
+          <p:cNvPr id="4" name="TextBox 3"/>
+          <p:cNvSpPr txBox="1"/>
+          <p:nvPr/>
+        </p:nvSpPr>
+        <p:spPr>
+          <a:xfrm>
+            <a:off x="438912" y="384048"/>
+            <a:ext cx="11314175" cy="420624"/>
+          </a:xfrm>
+          <a:prstGeom prst="rect">
+            <a:avLst/>
+          </a:prstGeom>
+          <a:noFill/>
+        </p:spPr>
+        <p:txBody>
+          <a:bodyPr wrap="square" lIns="18288" rIns="18288" tIns="18288" bIns="18288" anchor="ctr"/>
+          <a:lstStyle/>
+          <a:p>
+            <a:pPr algn="l">
+              <a:lnSpc>
+                <a:spcPct val="105000"/>
+              </a:lnSpc>
+              <a:spcBef>
+                <a:spcPts val="0"/>
+              </a:spcBef>
+              <a:spcAft>
+                <a:spcPts val="200"/>
+              </a:spcAft>
+            </a:pPr>
+            <a:r>
+              <a:rPr sz="2600" b="1">
+                <a:solidFill>
+                  <a:srgbClr val="161B22"/>
+                </a:solidFill>
+                <a:latin typeface="Microsoft YaHei"/>
+                <a:ea typeface="Microsoft YaHei"/>
+                <a:cs typeface="Microsoft YaHei"/>
+              </a:rPr>
+              <a:t>Decode 什么条件下用 SSD 池，什么时候必须用 DDR 池</a:t>
+            </a:r>
+          </a:p>
+        </p:txBody>
+      </p:sp>
+      <p:sp>
+        <p:nvSpPr>
+          <p:cNvPr id="5" name="Rectangle 4"/>
+          <p:cNvSpPr/>
+          <p:nvPr/>
+        </p:nvSpPr>
+        <p:spPr>
+          <a:xfrm>
+            <a:off x="438912" y="877824"/>
+            <a:ext cx="11314175" cy="658368"/>
+          </a:xfrm>
+          <a:prstGeom prst="rect">
+            <a:avLst/>
+          </a:prstGeom>
+          <a:solidFill>
+            <a:srgbClr val="F4F7FA"/>
+          </a:solidFill>
+          <a:ln>
+            <a:noFill/>
+          </a:ln>
+        </p:spPr>
+        <p:style>
+          <a:lnRef idx="1">
+            <a:schemeClr val="accent1"/>
+          </a:lnRef>
+          <a:fillRef idx="3">
+            <a:schemeClr val="accent1"/>
+          </a:fillRef>
+          <a:effectRef idx="2">
+            <a:schemeClr val="accent1"/>
+          </a:effectRef>
+          <a:fontRef idx="minor">
+            <a:schemeClr val="lt1"/>
+          </a:fontRef>
+        </p:style>
+        <p:txBody>
+          <a:bodyPr rtlCol="0" anchor="ctr"/>
+          <a:lstStyle/>
+          <a:p>
+            <a:pPr algn="ctr"/>
+          </a:p>
+        </p:txBody>
+      </p:sp>
+      <p:sp>
+        <p:nvSpPr>
+          <p:cNvPr id="6" name="Rectangle 5"/>
+          <p:cNvSpPr/>
+          <p:nvPr/>
+        </p:nvSpPr>
+        <p:spPr>
+          <a:xfrm>
+            <a:off x="438912" y="877824"/>
+            <a:ext cx="73152" cy="658368"/>
+          </a:xfrm>
+          <a:prstGeom prst="rect">
+            <a:avLst/>
+          </a:prstGeom>
+          <a:solidFill>
+            <a:srgbClr val="0E4A8A"/>
+          </a:solidFill>
+          <a:ln>
+            <a:noFill/>
+          </a:ln>
+        </p:spPr>
+        <p:style>
+          <a:lnRef idx="1">
+            <a:schemeClr val="accent1"/>
+          </a:lnRef>
+          <a:fillRef idx="3">
+            <a:schemeClr val="accent1"/>
+          </a:fillRef>
+          <a:effectRef idx="2">
+            <a:schemeClr val="accent1"/>
+          </a:effectRef>
+          <a:fontRef idx="minor">
+            <a:schemeClr val="lt1"/>
+          </a:fontRef>
+        </p:style>
+        <p:txBody>
+          <a:bodyPr rtlCol="0" anchor="ctr"/>
+          <a:lstStyle/>
+          <a:p>
+            <a:pPr algn="ctr"/>
+          </a:p>
+        </p:txBody>
+      </p:sp>
+      <p:sp>
+        <p:nvSpPr>
+          <p:cNvPr id="7" name="TextBox 6"/>
+          <p:cNvSpPr txBox="1"/>
+          <p:nvPr/>
+        </p:nvSpPr>
+        <p:spPr>
+          <a:xfrm>
+            <a:off x="658368" y="877824"/>
+            <a:ext cx="10948415" cy="658368"/>
+          </a:xfrm>
+          <a:prstGeom prst="rect">
+            <a:avLst/>
+          </a:prstGeom>
+          <a:noFill/>
+        </p:spPr>
+        <p:txBody>
+          <a:bodyPr wrap="square" lIns="18288" rIns="18288" tIns="18288" bIns="18288" anchor="ctr"/>
+          <a:lstStyle/>
+          <a:p>
+            <a:pPr algn="l">
+              <a:lnSpc>
+                <a:spcPct val="115000"/>
+              </a:lnSpc>
+              <a:spcBef>
+                <a:spcPts val="0"/>
+              </a:spcBef>
+              <a:spcAft>
+                <a:spcPts val="200"/>
+              </a:spcAft>
+            </a:pPr>
+            <a:r>
+              <a:rPr sz="1500" b="0">
+                <a:solidFill>
+                  <a:srgbClr val="161B22"/>
+                </a:solidFill>
+                <a:latin typeface="Microsoft YaHei"/>
+                <a:ea typeface="Microsoft YaHei"/>
+                <a:cs typeface="Microsoft YaHei"/>
+              </a:rPr>
+              <a:t>历史 KV 的数值不变，每步用新的 Q 重读一遍。池子只承接 HBM 放不下的缺页，从第二个 token 起计入 TPOT。</a:t>
+            </a:r>
+          </a:p>
+        </p:txBody>
+      </p:sp>
+      <p:sp>
+        <p:nvSpPr>
+          <p:cNvPr id="8" name="Rectangle 7"/>
+          <p:cNvSpPr/>
+          <p:nvPr/>
+        </p:nvSpPr>
+        <p:spPr>
+          <a:xfrm>
+            <a:off x="438912" y="6547104"/>
+            <a:ext cx="11314175" cy="9144"/>
+          </a:xfrm>
+          <a:prstGeom prst="rect">
+            <a:avLst/>
+          </a:prstGeom>
+          <a:solidFill>
+            <a:srgbClr val="D6DDE5"/>
+          </a:solidFill>
+          <a:ln>
+            <a:noFill/>
+          </a:ln>
+        </p:spPr>
+        <p:style>
+          <a:lnRef idx="1">
+            <a:schemeClr val="accent1"/>
+          </a:lnRef>
+          <a:fillRef idx="3">
+            <a:schemeClr val="accent1"/>
+          </a:fillRef>
+          <a:effectRef idx="2">
+            <a:schemeClr val="accent1"/>
+          </a:effectRef>
+          <a:fontRef idx="minor">
+            <a:schemeClr val="lt1"/>
+          </a:fontRef>
+        </p:style>
+        <p:txBody>
+          <a:bodyPr rtlCol="0" anchor="ctr"/>
+          <a:lstStyle/>
+          <a:p>
+            <a:pPr algn="ctr"/>
+          </a:p>
+        </p:txBody>
+      </p:sp>
+      <p:sp>
+        <p:nvSpPr>
+          <p:cNvPr id="9" name="TextBox 8"/>
+          <p:cNvSpPr txBox="1"/>
+          <p:nvPr/>
+        </p:nvSpPr>
+        <p:spPr>
+          <a:xfrm>
+            <a:off x="438912" y="6583680"/>
+            <a:ext cx="7315200" cy="237744"/>
+          </a:xfrm>
+          <a:prstGeom prst="rect">
+            <a:avLst/>
+          </a:prstGeom>
+          <a:noFill/>
+        </p:spPr>
+        <p:txBody>
+          <a:bodyPr wrap="square" lIns="18288" rIns="18288" tIns="18288" bIns="18288" anchor="ctr"/>
+          <a:lstStyle/>
+          <a:p>
+            <a:pPr algn="l">
+              <a:lnSpc>
+                <a:spcPct val="105000"/>
+              </a:lnSpc>
+              <a:spcBef>
+                <a:spcPts val="0"/>
+              </a:spcBef>
+              <a:spcAft>
+                <a:spcPts val="200"/>
+              </a:spcAft>
+            </a:pPr>
+            <a:r>
+              <a:rPr sz="1200" b="0">
+                <a:solidFill>
+                  <a:srgbClr val="58626E"/>
+                </a:solidFill>
+                <a:latin typeface="Microsoft YaHei"/>
+                <a:ea typeface="Microsoft YaHei"/>
+                <a:cs typeface="Microsoft YaHei"/>
+              </a:rPr>
+              <a:t>Decode KV 池</a:t>
+            </a:r>
+          </a:p>
+        </p:txBody>
+      </p:sp>
+      <p:sp>
+        <p:nvSpPr>
+          <p:cNvPr id="10" name="TextBox 9"/>
+          <p:cNvSpPr txBox="1"/>
+          <p:nvPr/>
+        </p:nvSpPr>
+        <p:spPr>
+          <a:xfrm>
+            <a:off x="10290047" y="6583680"/>
+            <a:ext cx="1463040" cy="237744"/>
+          </a:xfrm>
+          <a:prstGeom prst="rect">
+            <a:avLst/>
+          </a:prstGeom>
+          <a:noFill/>
+        </p:spPr>
+        <p:txBody>
+          <a:bodyPr wrap="square" lIns="18288" rIns="18288" tIns="18288" bIns="18288" anchor="ctr"/>
+          <a:lstStyle/>
+          <a:p>
+            <a:pPr algn="r">
+              <a:lnSpc>
+                <a:spcPct val="105000"/>
+              </a:lnSpc>
+              <a:spcBef>
+                <a:spcPts val="0"/>
+              </a:spcBef>
+              <a:spcAft>
+                <a:spcPts val="200"/>
+              </a:spcAft>
+            </a:pPr>
+            <a:r>
+              <a:rPr sz="1200" b="1">
+                <a:solidFill>
+                  <a:srgbClr val="0E4A8A"/>
+                </a:solidFill>
+                <a:latin typeface="Microsoft YaHei"/>
+                <a:ea typeface="Microsoft YaHei"/>
+                <a:cs typeface="Microsoft YaHei"/>
+              </a:rPr>
+              <a:t>1  /  4</a:t>
+            </a:r>
+          </a:p>
+        </p:txBody>
+      </p:sp>
+      <p:sp>
+        <p:nvSpPr>
+          <p:cNvPr id="11" name="Rectangle 10"/>
+          <p:cNvSpPr/>
+          <p:nvPr/>
+        </p:nvSpPr>
+        <p:spPr>
+          <a:xfrm>
+            <a:off x="438912" y="1682495"/>
+            <a:ext cx="11314175" cy="1514855"/>
+          </a:xfrm>
+          <a:prstGeom prst="rect">
+            <a:avLst/>
+          </a:prstGeom>
+          <a:solidFill>
+            <a:srgbClr val="F6F7F9"/>
+          </a:solidFill>
+          <a:ln>
+            <a:noFill/>
+          </a:ln>
+        </p:spPr>
+        <p:style>
+          <a:lnRef idx="1">
+            <a:schemeClr val="accent1"/>
+          </a:lnRef>
+          <a:fillRef idx="3">
+            <a:schemeClr val="accent1"/>
+          </a:fillRef>
+          <a:effectRef idx="2">
+            <a:schemeClr val="accent1"/>
+          </a:effectRef>
+          <a:fontRef idx="minor">
+            <a:schemeClr val="lt1"/>
+          </a:fontRef>
+        </p:style>
+        <p:txBody>
+          <a:bodyPr rtlCol="0" anchor="ctr"/>
+          <a:lstStyle/>
+          <a:p>
+            <a:pPr algn="ctr"/>
+          </a:p>
+        </p:txBody>
+      </p:sp>
+      <p:sp>
+        <p:nvSpPr>
+          <p:cNvPr id="12" name="Rectangle 11"/>
+          <p:cNvSpPr/>
+          <p:nvPr/>
+        </p:nvSpPr>
+        <p:spPr>
+          <a:xfrm>
+            <a:off x="438912" y="1682495"/>
+            <a:ext cx="73152" cy="1514855"/>
+          </a:xfrm>
+          <a:prstGeom prst="rect">
+            <a:avLst/>
+          </a:prstGeom>
+          <a:solidFill>
+            <a:srgbClr val="606A76"/>
+          </a:solidFill>
+          <a:ln>
+            <a:noFill/>
+          </a:ln>
+        </p:spPr>
+        <p:style>
+          <a:lnRef idx="1">
+            <a:schemeClr val="accent1"/>
+          </a:lnRef>
+          <a:fillRef idx="3">
+            <a:schemeClr val="accent1"/>
+          </a:fillRef>
+          <a:effectRef idx="2">
+            <a:schemeClr val="accent1"/>
+          </a:effectRef>
+          <a:fontRef idx="minor">
+            <a:schemeClr val="lt1"/>
+          </a:fontRef>
+        </p:style>
+        <p:txBody>
+          <a:bodyPr rtlCol="0" anchor="ctr"/>
+          <a:lstStyle/>
+          <a:p>
+            <a:pPr algn="ctr"/>
+          </a:p>
+        </p:txBody>
+      </p:sp>
+      <p:sp>
+        <p:nvSpPr>
+          <p:cNvPr id="13" name="TextBox 12"/>
+          <p:cNvSpPr txBox="1"/>
+          <p:nvPr/>
+        </p:nvSpPr>
+        <p:spPr>
+          <a:xfrm>
+            <a:off x="658368" y="1682495"/>
+            <a:ext cx="2148840" cy="1514855"/>
+          </a:xfrm>
+          <a:prstGeom prst="rect">
+            <a:avLst/>
+          </a:prstGeom>
+          <a:noFill/>
+        </p:spPr>
+        <p:txBody>
+          <a:bodyPr wrap="square" lIns="18288" rIns="18288" tIns="18288" bIns="18288" anchor="ctr"/>
+          <a:lstStyle/>
+          <a:p>
+            <a:pPr algn="l">
+              <a:lnSpc>
+                <a:spcPct val="115000"/>
+              </a:lnSpc>
+              <a:spcBef>
+                <a:spcPts val="0"/>
+              </a:spcBef>
+              <a:spcAft>
+                <a:spcPts val="200"/>
+              </a:spcAft>
+            </a:pPr>
+            <a:r>
+              <a:rPr sz="2200" b="1">
+                <a:solidFill>
+                  <a:srgbClr val="606A76"/>
+                </a:solidFill>
+                <a:latin typeface="Microsoft YaHei"/>
+                <a:ea typeface="Microsoft YaHei"/>
+                <a:cs typeface="Microsoft YaHei"/>
+              </a:rPr>
+              <a:t>不进池</a:t>
+            </a:r>
+          </a:p>
+          <a:p>
+            <a:pPr algn="l">
+              <a:lnSpc>
+                <a:spcPct val="115000"/>
+              </a:lnSpc>
+              <a:spcBef>
+                <a:spcPts val="0"/>
+              </a:spcBef>
+              <a:spcAft>
+                <a:spcPts val="200"/>
+              </a:spcAft>
+            </a:pPr>
+            <a:r>
+              <a:rPr sz="1400" b="0">
+                <a:solidFill>
+                  <a:srgbClr val="58626E"/>
+                </a:solidFill>
+                <a:latin typeface="Microsoft YaHei"/>
+                <a:ea typeface="Microsoft YaHei"/>
+                <a:cs typeface="Microsoft YaHei"/>
+              </a:rPr>
+              <a:t>HBM 装得下</a:t>
+            </a:r>
+          </a:p>
+        </p:txBody>
+      </p:sp>
+      <p:sp>
+        <p:nvSpPr>
+          <p:cNvPr id="14" name="Rectangle 13"/>
+          <p:cNvSpPr/>
+          <p:nvPr/>
+        </p:nvSpPr>
+        <p:spPr>
+          <a:xfrm>
+            <a:off x="2907792" y="1938528"/>
+            <a:ext cx="10972" cy="1002791"/>
+          </a:xfrm>
+          <a:prstGeom prst="rect">
+            <a:avLst/>
+          </a:prstGeom>
+          <a:solidFill>
+            <a:srgbClr val="D6DDE5"/>
+          </a:solidFill>
+          <a:ln>
+            <a:noFill/>
+          </a:ln>
+        </p:spPr>
+        <p:style>
+          <a:lnRef idx="1">
+            <a:schemeClr val="accent1"/>
+          </a:lnRef>
+          <a:fillRef idx="3">
+            <a:schemeClr val="accent1"/>
+          </a:fillRef>
+          <a:effectRef idx="2">
+            <a:schemeClr val="accent1"/>
+          </a:effectRef>
+          <a:fontRef idx="minor">
+            <a:schemeClr val="lt1"/>
+          </a:fontRef>
+        </p:style>
+        <p:txBody>
+          <a:bodyPr rtlCol="0" anchor="ctr"/>
+          <a:lstStyle/>
+          <a:p>
+            <a:pPr algn="ctr"/>
+          </a:p>
+        </p:txBody>
+      </p:sp>
+      <p:sp>
+        <p:nvSpPr>
+          <p:cNvPr id="15" name="TextBox 14"/>
+          <p:cNvSpPr txBox="1"/>
+          <p:nvPr/>
+        </p:nvSpPr>
+        <p:spPr>
+          <a:xfrm>
+            <a:off x="3136392" y="1682495"/>
+            <a:ext cx="8470391" cy="1514855"/>
+          </a:xfrm>
+          <a:prstGeom prst="rect">
+            <a:avLst/>
+          </a:prstGeom>
+          <a:noFill/>
+        </p:spPr>
+        <p:txBody>
+          <a:bodyPr wrap="square" lIns="18288" rIns="18288" tIns="18288" bIns="18288" anchor="ctr"/>
+          <a:lstStyle/>
+          <a:p>
+            <a:pPr algn="l">
+              <a:lnSpc>
+                <a:spcPct val="120000"/>
+              </a:lnSpc>
+              <a:spcBef>
+                <a:spcPts val="0"/>
+              </a:spcBef>
+              <a:spcAft>
+                <a:spcPts val="200"/>
+              </a:spcAft>
+            </a:pPr>
+            <a:r>
+              <a:rPr sz="1600" b="0">
+                <a:solidFill>
+                  <a:srgbClr val="161B22"/>
+                </a:solidFill>
+                <a:latin typeface="Microsoft YaHei"/>
+                <a:ea typeface="Microsoft YaHei"/>
+                <a:cs typeface="Microsoft YaHei"/>
+              </a:rPr>
+              <a:t>历史 KV 能整段留在 decode 侧 HBM。冷前缀若在第一个 token 之前装进 HBM，装载记在 TTFT。</a:t>
+            </a:r>
+          </a:p>
+          <a:p>
+            <a:pPr algn="l">
+              <a:lnSpc>
+                <a:spcPct val="120000"/>
+              </a:lnSpc>
+              <a:spcBef>
+                <a:spcPts val="0"/>
+              </a:spcBef>
+              <a:spcAft>
+                <a:spcPts val="200"/>
+              </a:spcAft>
+            </a:pPr>
+            <a:r>
+              <a:rPr sz="1600" b="1">
+                <a:solidFill>
+                  <a:srgbClr val="606A76"/>
+                </a:solidFill>
+                <a:latin typeface="Microsoft YaHei"/>
+                <a:ea typeface="Microsoft YaHei"/>
+                <a:cs typeface="Microsoft YaHei"/>
+              </a:rPr>
+              <a:t>每步只读 HBM，并把新 token 的 KV 写回 HBM。这一步不访问池子。</a:t>
+            </a:r>
+          </a:p>
+        </p:txBody>
+      </p:sp>
+      <p:sp>
+        <p:nvSpPr>
+          <p:cNvPr id="16" name="Rectangle 15"/>
+          <p:cNvSpPr/>
+          <p:nvPr/>
+        </p:nvSpPr>
+        <p:spPr>
+          <a:xfrm>
+            <a:off x="438912" y="3307079"/>
+            <a:ext cx="11314175" cy="1514855"/>
+          </a:xfrm>
+          <a:prstGeom prst="rect">
+            <a:avLst/>
+          </a:prstGeom>
+          <a:solidFill>
+            <a:srgbClr val="ECF3FA"/>
+          </a:solidFill>
+          <a:ln>
+            <a:noFill/>
+          </a:ln>
+        </p:spPr>
+        <p:style>
+          <a:lnRef idx="1">
+            <a:schemeClr val="accent1"/>
+          </a:lnRef>
+          <a:fillRef idx="3">
+            <a:schemeClr val="accent1"/>
+          </a:fillRef>
+          <a:effectRef idx="2">
+            <a:schemeClr val="accent1"/>
+          </a:effectRef>
+          <a:fontRef idx="minor">
+            <a:schemeClr val="lt1"/>
+          </a:fontRef>
+        </p:style>
+        <p:txBody>
+          <a:bodyPr rtlCol="0" anchor="ctr"/>
+          <a:lstStyle/>
+          <a:p>
+            <a:pPr algn="ctr"/>
+          </a:p>
+        </p:txBody>
+      </p:sp>
+      <p:sp>
+        <p:nvSpPr>
+          <p:cNvPr id="17" name="Rectangle 16"/>
+          <p:cNvSpPr/>
+          <p:nvPr/>
+        </p:nvSpPr>
+        <p:spPr>
+          <a:xfrm>
+            <a:off x="438912" y="3307079"/>
+            <a:ext cx="73152" cy="1514855"/>
+          </a:xfrm>
+          <a:prstGeom prst="rect">
+            <a:avLst/>
+          </a:prstGeom>
+          <a:solidFill>
+            <a:srgbClr val="0E4A8A"/>
+          </a:solidFill>
+          <a:ln>
+            <a:noFill/>
+          </a:ln>
+        </p:spPr>
+        <p:style>
+          <a:lnRef idx="1">
+            <a:schemeClr val="accent1"/>
+          </a:lnRef>
+          <a:fillRef idx="3">
+            <a:schemeClr val="accent1"/>
+          </a:fillRef>
+          <a:effectRef idx="2">
+            <a:schemeClr val="accent1"/>
+          </a:effectRef>
+          <a:fontRef idx="minor">
+            <a:schemeClr val="lt1"/>
+          </a:fontRef>
+        </p:style>
+        <p:txBody>
+          <a:bodyPr rtlCol="0" anchor="ctr"/>
+          <a:lstStyle/>
+          <a:p>
+            <a:pPr algn="ctr"/>
+          </a:p>
+        </p:txBody>
+      </p:sp>
+      <p:sp>
+        <p:nvSpPr>
+          <p:cNvPr id="18" name="TextBox 17"/>
+          <p:cNvSpPr txBox="1"/>
+          <p:nvPr/>
+        </p:nvSpPr>
+        <p:spPr>
+          <a:xfrm>
+            <a:off x="658368" y="3307079"/>
+            <a:ext cx="2148840" cy="1514855"/>
+          </a:xfrm>
+          <a:prstGeom prst="rect">
+            <a:avLst/>
+          </a:prstGeom>
+          <a:noFill/>
+        </p:spPr>
+        <p:txBody>
+          <a:bodyPr wrap="square" lIns="18288" rIns="18288" tIns="18288" bIns="18288" anchor="ctr"/>
+          <a:lstStyle/>
+          <a:p>
+            <a:pPr algn="l">
+              <a:lnSpc>
+                <a:spcPct val="115000"/>
+              </a:lnSpc>
+              <a:spcBef>
+                <a:spcPts val="0"/>
+              </a:spcBef>
+              <a:spcAft>
+                <a:spcPts val="200"/>
+              </a:spcAft>
+            </a:pPr>
+            <a:r>
+              <a:rPr sz="2200" b="1">
+                <a:solidFill>
+                  <a:srgbClr val="0E4A8A"/>
+                </a:solidFill>
+                <a:latin typeface="Microsoft YaHei"/>
+                <a:ea typeface="Microsoft YaHei"/>
+                <a:cs typeface="Microsoft YaHei"/>
+              </a:rPr>
+              <a:t>可以用 SSD</a:t>
+            </a:r>
+          </a:p>
+          <a:p>
+            <a:pPr algn="l">
+              <a:lnSpc>
+                <a:spcPct val="115000"/>
+              </a:lnSpc>
+              <a:spcBef>
+                <a:spcPts val="0"/>
+              </a:spcBef>
+              <a:spcAft>
+                <a:spcPts val="200"/>
+              </a:spcAft>
+            </a:pPr>
+            <a:r>
+              <a:rPr sz="1400" b="0">
+                <a:solidFill>
+                  <a:srgbClr val="58626E"/>
+                </a:solidFill>
+                <a:latin typeface="Microsoft YaHei"/>
+                <a:ea typeface="Microsoft YaHei"/>
+                <a:cs typeface="Microsoft YaHei"/>
+              </a:rPr>
+              <a:t>大页把接口喂满</a:t>
+            </a:r>
+          </a:p>
+        </p:txBody>
+      </p:sp>
+      <p:sp>
+        <p:nvSpPr>
+          <p:cNvPr id="19" name="Rectangle 18"/>
+          <p:cNvSpPr/>
+          <p:nvPr/>
+        </p:nvSpPr>
+        <p:spPr>
+          <a:xfrm>
+            <a:off x="2907792" y="3563112"/>
+            <a:ext cx="10972" cy="1002791"/>
+          </a:xfrm>
+          <a:prstGeom prst="rect">
+            <a:avLst/>
+          </a:prstGeom>
+          <a:solidFill>
+            <a:srgbClr val="D6DDE5"/>
+          </a:solidFill>
+          <a:ln>
+            <a:noFill/>
+          </a:ln>
+        </p:spPr>
+        <p:style>
+          <a:lnRef idx="1">
+            <a:schemeClr val="accent1"/>
+          </a:lnRef>
+          <a:fillRef idx="3">
+            <a:schemeClr val="accent1"/>
+          </a:fillRef>
+          <a:effectRef idx="2">
+            <a:schemeClr val="accent1"/>
+          </a:effectRef>
+          <a:fontRef idx="minor">
+            <a:schemeClr val="lt1"/>
+          </a:fontRef>
+        </p:style>
+        <p:txBody>
+          <a:bodyPr rtlCol="0" anchor="ctr"/>
+          <a:lstStyle/>
+          <a:p>
+            <a:pPr algn="ctr"/>
+          </a:p>
+        </p:txBody>
+      </p:sp>
+      <p:sp>
+        <p:nvSpPr>
+          <p:cNvPr id="20" name="TextBox 19"/>
+          <p:cNvSpPr txBox="1"/>
+          <p:nvPr/>
+        </p:nvSpPr>
+        <p:spPr>
+          <a:xfrm>
+            <a:off x="3136392" y="3307079"/>
+            <a:ext cx="8470391" cy="1514855"/>
+          </a:xfrm>
+          <a:prstGeom prst="rect">
+            <a:avLst/>
+          </a:prstGeom>
+          <a:noFill/>
+        </p:spPr>
+        <p:txBody>
+          <a:bodyPr wrap="square" lIns="18288" rIns="18288" tIns="18288" bIns="18288" anchor="ctr"/>
+          <a:lstStyle/>
+          <a:p>
+            <a:pPr algn="l">
+              <a:lnSpc>
+                <a:spcPct val="120000"/>
+              </a:lnSpc>
+              <a:spcBef>
+                <a:spcPts val="0"/>
+              </a:spcBef>
+              <a:spcAft>
+                <a:spcPts val="200"/>
+              </a:spcAft>
+            </a:pPr>
+            <a:r>
+              <a:rPr sz="1600" b="0">
+                <a:solidFill>
+                  <a:srgbClr val="161B22"/>
+                </a:solidFill>
+                <a:latin typeface="Microsoft YaHei"/>
+                <a:ea typeface="Microsoft YaHei"/>
+                <a:cs typeface="Microsoft YaHei"/>
+              </a:rPr>
+              <a:t>缺页在 TPOT 上，同一层连续存放并按层大读，接口被喂满。合同看平均 TPOT，或没有 TPOT 合同。</a:t>
+            </a:r>
+          </a:p>
+          <a:p>
+            <a:pPr algn="l">
+              <a:lnSpc>
+                <a:spcPct val="120000"/>
+              </a:lnSpc>
+              <a:spcBef>
+                <a:spcPts val="0"/>
+              </a:spcBef>
+              <a:spcAft>
+                <a:spcPts val="200"/>
+              </a:spcAft>
+            </a:pPr>
+            <a:r>
+              <a:rPr sz="1600" b="1">
+                <a:solidFill>
+                  <a:srgbClr val="0E4A8A"/>
+                </a:solidFill>
+                <a:latin typeface="Microsoft YaHei"/>
+                <a:ea typeface="Microsoft YaHei"/>
+                <a:cs typeface="Microsoft YaHei"/>
+              </a:rPr>
+              <a:t>平均传输时间由接口带宽决定，与 DDR 相同。</a:t>
+            </a:r>
+          </a:p>
+        </p:txBody>
+      </p:sp>
+      <p:sp>
+        <p:nvSpPr>
+          <p:cNvPr id="21" name="Rectangle 20"/>
+          <p:cNvSpPr/>
+          <p:nvPr/>
+        </p:nvSpPr>
+        <p:spPr>
+          <a:xfrm>
+            <a:off x="438912" y="4931663"/>
+            <a:ext cx="11314175" cy="1514855"/>
+          </a:xfrm>
+          <a:prstGeom prst="rect">
+            <a:avLst/>
+          </a:prstGeom>
+          <a:solidFill>
+            <a:srgbClr val="FAF2F1"/>
+          </a:solidFill>
+          <a:ln>
+            <a:noFill/>
+          </a:ln>
+        </p:spPr>
+        <p:style>
+          <a:lnRef idx="1">
+            <a:schemeClr val="accent1"/>
+          </a:lnRef>
+          <a:fillRef idx="3">
+            <a:schemeClr val="accent1"/>
+          </a:fillRef>
+          <a:effectRef idx="2">
+            <a:schemeClr val="accent1"/>
+          </a:effectRef>
+          <a:fontRef idx="minor">
+            <a:schemeClr val="lt1"/>
+          </a:fontRef>
+        </p:style>
+        <p:txBody>
+          <a:bodyPr rtlCol="0" anchor="ctr"/>
+          <a:lstStyle/>
+          <a:p>
+            <a:pPr algn="ctr"/>
+          </a:p>
+        </p:txBody>
+      </p:sp>
+      <p:sp>
+        <p:nvSpPr>
+          <p:cNvPr id="22" name="Rectangle 21"/>
+          <p:cNvSpPr/>
+          <p:nvPr/>
+        </p:nvSpPr>
+        <p:spPr>
+          <a:xfrm>
+            <a:off x="438912" y="4931663"/>
+            <a:ext cx="73152" cy="1514855"/>
+          </a:xfrm>
+          <a:prstGeom prst="rect">
+            <a:avLst/>
+          </a:prstGeom>
+          <a:solidFill>
+            <a:srgbClr val="8C2A24"/>
+          </a:solidFill>
+          <a:ln>
+            <a:noFill/>
+          </a:ln>
+        </p:spPr>
+        <p:style>
+          <a:lnRef idx="1">
+            <a:schemeClr val="accent1"/>
+          </a:lnRef>
+          <a:fillRef idx="3">
+            <a:schemeClr val="accent1"/>
+          </a:fillRef>
+          <a:effectRef idx="2">
+            <a:schemeClr val="accent1"/>
+          </a:effectRef>
+          <a:fontRef idx="minor">
+            <a:schemeClr val="lt1"/>
+          </a:fontRef>
+        </p:style>
+        <p:txBody>
+          <a:bodyPr rtlCol="0" anchor="ctr"/>
+          <a:lstStyle/>
+          <a:p>
+            <a:pPr algn="ctr"/>
+          </a:p>
+        </p:txBody>
+      </p:sp>
+      <p:sp>
+        <p:nvSpPr>
+          <p:cNvPr id="23" name="TextBox 22"/>
+          <p:cNvSpPr txBox="1"/>
+          <p:nvPr/>
+        </p:nvSpPr>
+        <p:spPr>
+          <a:xfrm>
+            <a:off x="658368" y="4931663"/>
+            <a:ext cx="2148840" cy="1514855"/>
+          </a:xfrm>
+          <a:prstGeom prst="rect">
+            <a:avLst/>
+          </a:prstGeom>
+          <a:noFill/>
+        </p:spPr>
+        <p:txBody>
+          <a:bodyPr wrap="square" lIns="18288" rIns="18288" tIns="18288" bIns="18288" anchor="ctr"/>
+          <a:lstStyle/>
+          <a:p>
+            <a:pPr algn="l">
+              <a:lnSpc>
+                <a:spcPct val="115000"/>
+              </a:lnSpc>
+              <a:spcBef>
+                <a:spcPts val="0"/>
+              </a:spcBef>
+              <a:spcAft>
+                <a:spcPts val="200"/>
+              </a:spcAft>
+            </a:pPr>
+            <a:r>
+              <a:rPr sz="2200" b="1">
+                <a:solidFill>
+                  <a:srgbClr val="8C2A24"/>
+                </a:solidFill>
+                <a:latin typeface="Microsoft YaHei"/>
+                <a:ea typeface="Microsoft YaHei"/>
+                <a:cs typeface="Microsoft YaHei"/>
+              </a:rPr>
+              <a:t>必须用 DDR</a:t>
+            </a:r>
+          </a:p>
+          <a:p>
+            <a:pPr algn="l">
+              <a:lnSpc>
+                <a:spcPct val="115000"/>
+              </a:lnSpc>
+              <a:spcBef>
+                <a:spcPts val="0"/>
+              </a:spcBef>
+              <a:spcAft>
+                <a:spcPts val="200"/>
+              </a:spcAft>
+            </a:pPr>
+            <a:r>
+              <a:rPr sz="1400" b="0">
+                <a:solidFill>
+                  <a:srgbClr val="58626E"/>
+                </a:solidFill>
+                <a:latin typeface="Microsoft YaHei"/>
+                <a:ea typeface="Microsoft YaHei"/>
+                <a:cs typeface="Microsoft YaHei"/>
+              </a:rPr>
+              <a:t>喂不满，或要保 p99</a:t>
+            </a:r>
+          </a:p>
+        </p:txBody>
+      </p:sp>
+      <p:sp>
+        <p:nvSpPr>
+          <p:cNvPr id="24" name="Rectangle 23"/>
+          <p:cNvSpPr/>
+          <p:nvPr/>
+        </p:nvSpPr>
+        <p:spPr>
+          <a:xfrm>
+            <a:off x="2907792" y="5187696"/>
+            <a:ext cx="10972" cy="1002791"/>
+          </a:xfrm>
+          <a:prstGeom prst="rect">
+            <a:avLst/>
+          </a:prstGeom>
+          <a:solidFill>
+            <a:srgbClr val="D6DDE5"/>
+          </a:solidFill>
+          <a:ln>
+            <a:noFill/>
+          </a:ln>
+        </p:spPr>
+        <p:style>
+          <a:lnRef idx="1">
+            <a:schemeClr val="accent1"/>
+          </a:lnRef>
+          <a:fillRef idx="3">
+            <a:schemeClr val="accent1"/>
+          </a:fillRef>
+          <a:effectRef idx="2">
+            <a:schemeClr val="accent1"/>
+          </a:effectRef>
+          <a:fontRef idx="minor">
+            <a:schemeClr val="lt1"/>
+          </a:fontRef>
+        </p:style>
+        <p:txBody>
+          <a:bodyPr rtlCol="0" anchor="ctr"/>
+          <a:lstStyle/>
+          <a:p>
+            <a:pPr algn="ctr"/>
+          </a:p>
+        </p:txBody>
+      </p:sp>
+      <p:sp>
+        <p:nvSpPr>
+          <p:cNvPr id="25" name="TextBox 24"/>
+          <p:cNvSpPr txBox="1"/>
+          <p:nvPr/>
+        </p:nvSpPr>
+        <p:spPr>
+          <a:xfrm>
+            <a:off x="3136392" y="4931663"/>
+            <a:ext cx="8470391" cy="1514855"/>
+          </a:xfrm>
+          <a:prstGeom prst="rect">
+            <a:avLst/>
+          </a:prstGeom>
+          <a:noFill/>
+        </p:spPr>
+        <p:txBody>
+          <a:bodyPr wrap="square" lIns="18288" rIns="18288" tIns="18288" bIns="18288" anchor="ctr"/>
+          <a:lstStyle/>
+          <a:p>
+            <a:pPr algn="l">
+              <a:lnSpc>
+                <a:spcPct val="120000"/>
+              </a:lnSpc>
+              <a:spcBef>
+                <a:spcPts val="0"/>
+              </a:spcBef>
+              <a:spcAft>
+                <a:spcPts val="200"/>
+              </a:spcAft>
+            </a:pPr>
+            <a:r>
+              <a:rPr sz="1600" b="0">
+                <a:solidFill>
+                  <a:srgbClr val="161B22"/>
+                </a:solidFill>
+                <a:latin typeface="Microsoft YaHei"/>
+                <a:ea typeface="Microsoft YaHei"/>
+                <a:cs typeface="Microsoft YaHei"/>
+              </a:rPr>
+              <a:t>缺页在 TPOT 上，而且是小页随机读，或合同写 p99，或单次 IO 的时延已经大于剩余预算。</a:t>
+            </a:r>
+          </a:p>
+          <a:p>
+            <a:pPr algn="l">
+              <a:lnSpc>
+                <a:spcPct val="120000"/>
+              </a:lnSpc>
+              <a:spcBef>
+                <a:spcPts val="0"/>
+              </a:spcBef>
+              <a:spcAft>
+                <a:spcPts val="200"/>
+              </a:spcAft>
+            </a:pPr>
+            <a:r>
+              <a:rPr sz="1600" b="1">
+                <a:solidFill>
+                  <a:srgbClr val="8C2A24"/>
+                </a:solidFill>
+                <a:latin typeface="Microsoft YaHei"/>
+                <a:ea typeface="Microsoft YaHei"/>
+                <a:cs typeface="Microsoft YaHei"/>
+              </a:rPr>
+              <a:t>这时 SSD 喂不满接口，或长尾直接进每一个 token。</a:t>
+            </a:r>
+          </a:p>
+        </p:txBody>
+      </p:sp>
     </p:spTree>
   </p:cSld>
   <p:clrMapOvr>
@@ -3134,30 +4307,1563 @@
         <p:nvPr/>
       </p:nvGrpSpPr>
       <p:grpSpPr/>
-      <p:pic>
-        <p:nvPicPr>
-          <p:cNvPr id="2" name="Picture 1" descr="02.png"/>
-          <p:cNvPicPr>
-            <a:picLocks noChangeAspect="1"/>
-          </p:cNvPicPr>
-          <p:nvPr/>
-        </p:nvPicPr>
-        <p:blipFill>
-          <a:blip r:embed="rId2"/>
-          <a:stretch>
-            <a:fillRect/>
-          </a:stretch>
-        </p:blipFill>
+      <p:sp>
+        <p:nvSpPr>
+          <p:cNvPr id="2" name="Rectangle 1"/>
+          <p:cNvSpPr/>
+          <p:nvPr/>
+        </p:nvSpPr>
         <p:spPr>
           <a:xfrm>
             <a:off x="0" y="0"/>
-            <a:ext cx="12191999" cy="6858000"/>
-          </a:xfrm>
-          <a:prstGeom prst="rect">
-            <a:avLst/>
-          </a:prstGeom>
-        </p:spPr>
-      </p:pic>
+            <a:ext cx="12191999" cy="73152"/>
+          </a:xfrm>
+          <a:prstGeom prst="rect">
+            <a:avLst/>
+          </a:prstGeom>
+          <a:solidFill>
+            <a:srgbClr val="0E4A8A"/>
+          </a:solidFill>
+          <a:ln>
+            <a:noFill/>
+          </a:ln>
+        </p:spPr>
+        <p:style>
+          <a:lnRef idx="1">
+            <a:schemeClr val="accent1"/>
+          </a:lnRef>
+          <a:fillRef idx="3">
+            <a:schemeClr val="accent1"/>
+          </a:fillRef>
+          <a:effectRef idx="2">
+            <a:schemeClr val="accent1"/>
+          </a:effectRef>
+          <a:fontRef idx="minor">
+            <a:schemeClr val="lt1"/>
+          </a:fontRef>
+        </p:style>
+        <p:txBody>
+          <a:bodyPr rtlCol="0" anchor="ctr"/>
+          <a:lstStyle/>
+          <a:p>
+            <a:pPr algn="ctr"/>
+          </a:p>
+        </p:txBody>
+      </p:sp>
+      <p:sp>
+        <p:nvSpPr>
+          <p:cNvPr id="3" name="TextBox 2"/>
+          <p:cNvSpPr txBox="1"/>
+          <p:nvPr/>
+        </p:nvSpPr>
+        <p:spPr>
+          <a:xfrm>
+            <a:off x="438912" y="146304"/>
+            <a:ext cx="10972800" cy="256032"/>
+          </a:xfrm>
+          <a:prstGeom prst="rect">
+            <a:avLst/>
+          </a:prstGeom>
+          <a:noFill/>
+        </p:spPr>
+        <p:txBody>
+          <a:bodyPr wrap="square" lIns="18288" rIns="18288" tIns="18288" bIns="18288" anchor="ctr"/>
+          <a:lstStyle/>
+          <a:p>
+            <a:pPr algn="l">
+              <a:lnSpc>
+                <a:spcPct val="105000"/>
+              </a:lnSpc>
+              <a:spcBef>
+                <a:spcPts val="0"/>
+              </a:spcBef>
+              <a:spcAft>
+                <a:spcPts val="200"/>
+              </a:spcAft>
+            </a:pPr>
+            <a:r>
+              <a:rPr sz="1300" b="1">
+                <a:solidFill>
+                  <a:srgbClr val="0E4A8A"/>
+                </a:solidFill>
+                <a:latin typeface="Microsoft YaHei"/>
+                <a:ea typeface="Microsoft YaHei"/>
+                <a:cs typeface="Microsoft YaHei"/>
+              </a:rPr>
+              <a:t>计时</a:t>
+            </a:r>
+          </a:p>
+        </p:txBody>
+      </p:sp>
+      <p:sp>
+        <p:nvSpPr>
+          <p:cNvPr id="4" name="TextBox 3"/>
+          <p:cNvSpPr txBox="1"/>
+          <p:nvPr/>
+        </p:nvSpPr>
+        <p:spPr>
+          <a:xfrm>
+            <a:off x="438912" y="384048"/>
+            <a:ext cx="11314175" cy="420624"/>
+          </a:xfrm>
+          <a:prstGeom prst="rect">
+            <a:avLst/>
+          </a:prstGeom>
+          <a:noFill/>
+        </p:spPr>
+        <p:txBody>
+          <a:bodyPr wrap="square" lIns="18288" rIns="18288" tIns="18288" bIns="18288" anchor="ctr"/>
+          <a:lstStyle/>
+          <a:p>
+            <a:pPr algn="l">
+              <a:lnSpc>
+                <a:spcPct val="105000"/>
+              </a:lnSpc>
+              <a:spcBef>
+                <a:spcPts val="0"/>
+              </a:spcBef>
+              <a:spcAft>
+                <a:spcPts val="200"/>
+              </a:spcAft>
+            </a:pPr>
+            <a:r>
+              <a:rPr sz="2600" b="1">
+                <a:solidFill>
+                  <a:srgbClr val="161B22"/>
+                </a:solidFill>
+                <a:latin typeface="Microsoft YaHei"/>
+                <a:ea typeface="Microsoft YaHei"/>
+                <a:cs typeface="Microsoft YaHei"/>
+              </a:rPr>
+              <a:t>只有缺页的重读进入 TPOT</a:t>
+            </a:r>
+          </a:p>
+        </p:txBody>
+      </p:sp>
+      <p:sp>
+        <p:nvSpPr>
+          <p:cNvPr id="5" name="Rectangle 4"/>
+          <p:cNvSpPr/>
+          <p:nvPr/>
+        </p:nvSpPr>
+        <p:spPr>
+          <a:xfrm>
+            <a:off x="438912" y="877824"/>
+            <a:ext cx="11314175" cy="658368"/>
+          </a:xfrm>
+          <a:prstGeom prst="rect">
+            <a:avLst/>
+          </a:prstGeom>
+          <a:solidFill>
+            <a:srgbClr val="F4F7FA"/>
+          </a:solidFill>
+          <a:ln>
+            <a:noFill/>
+          </a:ln>
+        </p:spPr>
+        <p:style>
+          <a:lnRef idx="1">
+            <a:schemeClr val="accent1"/>
+          </a:lnRef>
+          <a:fillRef idx="3">
+            <a:schemeClr val="accent1"/>
+          </a:fillRef>
+          <a:effectRef idx="2">
+            <a:schemeClr val="accent1"/>
+          </a:effectRef>
+          <a:fontRef idx="minor">
+            <a:schemeClr val="lt1"/>
+          </a:fontRef>
+        </p:style>
+        <p:txBody>
+          <a:bodyPr rtlCol="0" anchor="ctr"/>
+          <a:lstStyle/>
+          <a:p>
+            <a:pPr algn="ctr"/>
+          </a:p>
+        </p:txBody>
+      </p:sp>
+      <p:sp>
+        <p:nvSpPr>
+          <p:cNvPr id="6" name="Rectangle 5"/>
+          <p:cNvSpPr/>
+          <p:nvPr/>
+        </p:nvSpPr>
+        <p:spPr>
+          <a:xfrm>
+            <a:off x="438912" y="877824"/>
+            <a:ext cx="73152" cy="658368"/>
+          </a:xfrm>
+          <a:prstGeom prst="rect">
+            <a:avLst/>
+          </a:prstGeom>
+          <a:solidFill>
+            <a:srgbClr val="0E4A8A"/>
+          </a:solidFill>
+          <a:ln>
+            <a:noFill/>
+          </a:ln>
+        </p:spPr>
+        <p:style>
+          <a:lnRef idx="1">
+            <a:schemeClr val="accent1"/>
+          </a:lnRef>
+          <a:fillRef idx="3">
+            <a:schemeClr val="accent1"/>
+          </a:fillRef>
+          <a:effectRef idx="2">
+            <a:schemeClr val="accent1"/>
+          </a:effectRef>
+          <a:fontRef idx="minor">
+            <a:schemeClr val="lt1"/>
+          </a:fontRef>
+        </p:style>
+        <p:txBody>
+          <a:bodyPr rtlCol="0" anchor="ctr"/>
+          <a:lstStyle/>
+          <a:p>
+            <a:pPr algn="ctr"/>
+          </a:p>
+        </p:txBody>
+      </p:sp>
+      <p:sp>
+        <p:nvSpPr>
+          <p:cNvPr id="7" name="TextBox 6"/>
+          <p:cNvSpPr txBox="1"/>
+          <p:nvPr/>
+        </p:nvSpPr>
+        <p:spPr>
+          <a:xfrm>
+            <a:off x="658368" y="877824"/>
+            <a:ext cx="10948415" cy="658368"/>
+          </a:xfrm>
+          <a:prstGeom prst="rect">
+            <a:avLst/>
+          </a:prstGeom>
+          <a:noFill/>
+        </p:spPr>
+        <p:txBody>
+          <a:bodyPr wrap="square" lIns="18288" rIns="18288" tIns="18288" bIns="18288" anchor="ctr"/>
+          <a:lstStyle/>
+          <a:p>
+            <a:pPr algn="l">
+              <a:lnSpc>
+                <a:spcPct val="115000"/>
+              </a:lnSpc>
+              <a:spcBef>
+                <a:spcPts val="0"/>
+              </a:spcBef>
+              <a:spcAft>
+                <a:spcPts val="200"/>
+              </a:spcAft>
+            </a:pPr>
+            <a:r>
+              <a:rPr sz="1500" b="0">
+                <a:solidFill>
+                  <a:srgbClr val="161B22"/>
+                </a:solidFill>
+                <a:latin typeface="Microsoft YaHei"/>
+                <a:ea typeface="Microsoft YaHei"/>
+                <a:cs typeface="Microsoft YaHei"/>
+              </a:rPr>
+              <a:t>交接和第一个 token 的取数记在 TTFT。第二个 token 起，不在 HBM 里的历史 KV 每步重读，才计入 TPOT。</a:t>
+            </a:r>
+          </a:p>
+        </p:txBody>
+      </p:sp>
+      <p:sp>
+        <p:nvSpPr>
+          <p:cNvPr id="8" name="Rectangle 7"/>
+          <p:cNvSpPr/>
+          <p:nvPr/>
+        </p:nvSpPr>
+        <p:spPr>
+          <a:xfrm>
+            <a:off x="438912" y="6547104"/>
+            <a:ext cx="11314175" cy="9144"/>
+          </a:xfrm>
+          <a:prstGeom prst="rect">
+            <a:avLst/>
+          </a:prstGeom>
+          <a:solidFill>
+            <a:srgbClr val="D6DDE5"/>
+          </a:solidFill>
+          <a:ln>
+            <a:noFill/>
+          </a:ln>
+        </p:spPr>
+        <p:style>
+          <a:lnRef idx="1">
+            <a:schemeClr val="accent1"/>
+          </a:lnRef>
+          <a:fillRef idx="3">
+            <a:schemeClr val="accent1"/>
+          </a:fillRef>
+          <a:effectRef idx="2">
+            <a:schemeClr val="accent1"/>
+          </a:effectRef>
+          <a:fontRef idx="minor">
+            <a:schemeClr val="lt1"/>
+          </a:fontRef>
+        </p:style>
+        <p:txBody>
+          <a:bodyPr rtlCol="0" anchor="ctr"/>
+          <a:lstStyle/>
+          <a:p>
+            <a:pPr algn="ctr"/>
+          </a:p>
+        </p:txBody>
+      </p:sp>
+      <p:sp>
+        <p:nvSpPr>
+          <p:cNvPr id="9" name="TextBox 8"/>
+          <p:cNvSpPr txBox="1"/>
+          <p:nvPr/>
+        </p:nvSpPr>
+        <p:spPr>
+          <a:xfrm>
+            <a:off x="438912" y="6583680"/>
+            <a:ext cx="7315200" cy="237744"/>
+          </a:xfrm>
+          <a:prstGeom prst="rect">
+            <a:avLst/>
+          </a:prstGeom>
+          <a:noFill/>
+        </p:spPr>
+        <p:txBody>
+          <a:bodyPr wrap="square" lIns="18288" rIns="18288" tIns="18288" bIns="18288" anchor="ctr"/>
+          <a:lstStyle/>
+          <a:p>
+            <a:pPr algn="l">
+              <a:lnSpc>
+                <a:spcPct val="105000"/>
+              </a:lnSpc>
+              <a:spcBef>
+                <a:spcPts val="0"/>
+              </a:spcBef>
+              <a:spcAft>
+                <a:spcPts val="200"/>
+              </a:spcAft>
+            </a:pPr>
+            <a:r>
+              <a:rPr sz="1200" b="0">
+                <a:solidFill>
+                  <a:srgbClr val="58626E"/>
+                </a:solidFill>
+                <a:latin typeface="Microsoft YaHei"/>
+                <a:ea typeface="Microsoft YaHei"/>
+                <a:cs typeface="Microsoft YaHei"/>
+              </a:rPr>
+              <a:t>Decode KV 池</a:t>
+            </a:r>
+          </a:p>
+        </p:txBody>
+      </p:sp>
+      <p:sp>
+        <p:nvSpPr>
+          <p:cNvPr id="10" name="TextBox 9"/>
+          <p:cNvSpPr txBox="1"/>
+          <p:nvPr/>
+        </p:nvSpPr>
+        <p:spPr>
+          <a:xfrm>
+            <a:off x="10290047" y="6583680"/>
+            <a:ext cx="1463040" cy="237744"/>
+          </a:xfrm>
+          <a:prstGeom prst="rect">
+            <a:avLst/>
+          </a:prstGeom>
+          <a:noFill/>
+        </p:spPr>
+        <p:txBody>
+          <a:bodyPr wrap="square" lIns="18288" rIns="18288" tIns="18288" bIns="18288" anchor="ctr"/>
+          <a:lstStyle/>
+          <a:p>
+            <a:pPr algn="r">
+              <a:lnSpc>
+                <a:spcPct val="105000"/>
+              </a:lnSpc>
+              <a:spcBef>
+                <a:spcPts val="0"/>
+              </a:spcBef>
+              <a:spcAft>
+                <a:spcPts val="200"/>
+              </a:spcAft>
+            </a:pPr>
+            <a:r>
+              <a:rPr sz="1200" b="1">
+                <a:solidFill>
+                  <a:srgbClr val="0E4A8A"/>
+                </a:solidFill>
+                <a:latin typeface="Microsoft YaHei"/>
+                <a:ea typeface="Microsoft YaHei"/>
+                <a:cs typeface="Microsoft YaHei"/>
+              </a:rPr>
+              <a:t>2  /  4</a:t>
+            </a:r>
+          </a:p>
+        </p:txBody>
+      </p:sp>
+      <p:sp>
+        <p:nvSpPr>
+          <p:cNvPr id="11" name="Rectangle 10"/>
+          <p:cNvSpPr/>
+          <p:nvPr/>
+        </p:nvSpPr>
+        <p:spPr>
+          <a:xfrm>
+            <a:off x="438912" y="1682495"/>
+            <a:ext cx="11314175" cy="1122426"/>
+          </a:xfrm>
+          <a:prstGeom prst="rect">
+            <a:avLst/>
+          </a:prstGeom>
+          <a:solidFill>
+            <a:srgbClr val="FFFFFF"/>
+          </a:solidFill>
+          <a:ln w="12700">
+            <a:solidFill>
+              <a:srgbClr val="D6DDE5"/>
+            </a:solidFill>
+          </a:ln>
+        </p:spPr>
+        <p:style>
+          <a:lnRef idx="1">
+            <a:schemeClr val="accent1"/>
+          </a:lnRef>
+          <a:fillRef idx="3">
+            <a:schemeClr val="accent1"/>
+          </a:fillRef>
+          <a:effectRef idx="2">
+            <a:schemeClr val="accent1"/>
+          </a:effectRef>
+          <a:fontRef idx="minor">
+            <a:schemeClr val="lt1"/>
+          </a:fontRef>
+        </p:style>
+        <p:txBody>
+          <a:bodyPr rtlCol="0" anchor="ctr"/>
+          <a:lstStyle/>
+          <a:p>
+            <a:pPr algn="ctr"/>
+          </a:p>
+        </p:txBody>
+      </p:sp>
+      <p:sp>
+        <p:nvSpPr>
+          <p:cNvPr id="12" name="Rectangle 11"/>
+          <p:cNvSpPr/>
+          <p:nvPr/>
+        </p:nvSpPr>
+        <p:spPr>
+          <a:xfrm>
+            <a:off x="438912" y="1682495"/>
+            <a:ext cx="73152" cy="1122426"/>
+          </a:xfrm>
+          <a:prstGeom prst="rect">
+            <a:avLst/>
+          </a:prstGeom>
+          <a:solidFill>
+            <a:srgbClr val="606A76"/>
+          </a:solidFill>
+          <a:ln>
+            <a:noFill/>
+          </a:ln>
+        </p:spPr>
+        <p:style>
+          <a:lnRef idx="1">
+            <a:schemeClr val="accent1"/>
+          </a:lnRef>
+          <a:fillRef idx="3">
+            <a:schemeClr val="accent1"/>
+          </a:fillRef>
+          <a:effectRef idx="2">
+            <a:schemeClr val="accent1"/>
+          </a:effectRef>
+          <a:fontRef idx="minor">
+            <a:schemeClr val="lt1"/>
+          </a:fontRef>
+        </p:style>
+        <p:txBody>
+          <a:bodyPr rtlCol="0" anchor="ctr"/>
+          <a:lstStyle/>
+          <a:p>
+            <a:pPr algn="ctr"/>
+          </a:p>
+        </p:txBody>
+      </p:sp>
+      <p:sp>
+        <p:nvSpPr>
+          <p:cNvPr id="13" name="Rectangle 12"/>
+          <p:cNvSpPr/>
+          <p:nvPr/>
+        </p:nvSpPr>
+        <p:spPr>
+          <a:xfrm>
+            <a:off x="694944" y="2033397"/>
+            <a:ext cx="420624" cy="420624"/>
+          </a:xfrm>
+          <a:prstGeom prst="rect">
+            <a:avLst/>
+          </a:prstGeom>
+          <a:solidFill>
+            <a:srgbClr val="0E4A8A"/>
+          </a:solidFill>
+          <a:ln>
+            <a:noFill/>
+          </a:ln>
+        </p:spPr>
+        <p:style>
+          <a:lnRef idx="1">
+            <a:schemeClr val="accent1"/>
+          </a:lnRef>
+          <a:fillRef idx="3">
+            <a:schemeClr val="accent1"/>
+          </a:fillRef>
+          <a:effectRef idx="2">
+            <a:schemeClr val="accent1"/>
+          </a:effectRef>
+          <a:fontRef idx="minor">
+            <a:schemeClr val="lt1"/>
+          </a:fontRef>
+        </p:style>
+        <p:txBody>
+          <a:bodyPr rtlCol="0" anchor="ctr"/>
+          <a:lstStyle/>
+          <a:p>
+            <a:pPr algn="ctr"/>
+          </a:p>
+        </p:txBody>
+      </p:sp>
+      <p:sp>
+        <p:nvSpPr>
+          <p:cNvPr id="14" name="TextBox 13"/>
+          <p:cNvSpPr txBox="1"/>
+          <p:nvPr/>
+        </p:nvSpPr>
+        <p:spPr>
+          <a:xfrm>
+            <a:off x="694944" y="2033397"/>
+            <a:ext cx="420624" cy="420624"/>
+          </a:xfrm>
+          <a:prstGeom prst="rect">
+            <a:avLst/>
+          </a:prstGeom>
+          <a:noFill/>
+        </p:spPr>
+        <p:txBody>
+          <a:bodyPr wrap="square" lIns="18288" rIns="18288" tIns="18288" bIns="18288" anchor="ctr"/>
+          <a:lstStyle/>
+          <a:p>
+            <a:pPr algn="ctr">
+              <a:lnSpc>
+                <a:spcPct val="105000"/>
+              </a:lnSpc>
+              <a:spcBef>
+                <a:spcPts val="0"/>
+              </a:spcBef>
+              <a:spcAft>
+                <a:spcPts val="200"/>
+              </a:spcAft>
+            </a:pPr>
+            <a:r>
+              <a:rPr sz="1800" b="1">
+                <a:solidFill>
+                  <a:srgbClr val="FFFFFF"/>
+                </a:solidFill>
+                <a:latin typeface="Microsoft YaHei"/>
+                <a:ea typeface="Microsoft YaHei"/>
+                <a:cs typeface="Microsoft YaHei"/>
+              </a:rPr>
+              <a:t>1</a:t>
+            </a:r>
+          </a:p>
+        </p:txBody>
+      </p:sp>
+      <p:sp>
+        <p:nvSpPr>
+          <p:cNvPr id="15" name="TextBox 14"/>
+          <p:cNvSpPr txBox="1"/>
+          <p:nvPr/>
+        </p:nvSpPr>
+        <p:spPr>
+          <a:xfrm>
+            <a:off x="1261872" y="1682495"/>
+            <a:ext cx="2468880" cy="1122426"/>
+          </a:xfrm>
+          <a:prstGeom prst="rect">
+            <a:avLst/>
+          </a:prstGeom>
+          <a:noFill/>
+        </p:spPr>
+        <p:txBody>
+          <a:bodyPr wrap="square" lIns="18288" rIns="18288" tIns="18288" bIns="18288" anchor="ctr"/>
+          <a:lstStyle/>
+          <a:p>
+            <a:pPr algn="l">
+              <a:lnSpc>
+                <a:spcPct val="105000"/>
+              </a:lnSpc>
+              <a:spcBef>
+                <a:spcPts val="0"/>
+              </a:spcBef>
+              <a:spcAft>
+                <a:spcPts val="200"/>
+              </a:spcAft>
+            </a:pPr>
+            <a:r>
+              <a:rPr sz="1800" b="1">
+                <a:solidFill>
+                  <a:srgbClr val="161B22"/>
+                </a:solidFill>
+                <a:latin typeface="Microsoft YaHei"/>
+                <a:ea typeface="Microsoft YaHei"/>
+                <a:cs typeface="Microsoft YaHei"/>
+              </a:rPr>
+              <a:t>交接</a:t>
+            </a:r>
+          </a:p>
+          <a:p>
+            <a:pPr algn="l">
+              <a:lnSpc>
+                <a:spcPct val="105000"/>
+              </a:lnSpc>
+              <a:spcBef>
+                <a:spcPts val="0"/>
+              </a:spcBef>
+              <a:spcAft>
+                <a:spcPts val="200"/>
+              </a:spcAft>
+            </a:pPr>
+            <a:r>
+              <a:rPr sz="1300" b="1">
+                <a:solidFill>
+                  <a:srgbClr val="58626E"/>
+                </a:solidFill>
+                <a:latin typeface="Microsoft YaHei"/>
+                <a:ea typeface="Microsoft YaHei"/>
+                <a:cs typeface="Microsoft YaHei"/>
+              </a:rPr>
+              <a:t>TTFT</a:t>
+            </a:r>
+          </a:p>
+        </p:txBody>
+      </p:sp>
+      <p:sp>
+        <p:nvSpPr>
+          <p:cNvPr id="16" name="TextBox 15"/>
+          <p:cNvSpPr txBox="1"/>
+          <p:nvPr/>
+        </p:nvSpPr>
+        <p:spPr>
+          <a:xfrm>
+            <a:off x="3822191" y="1682495"/>
+            <a:ext cx="7748015" cy="1122426"/>
+          </a:xfrm>
+          <a:prstGeom prst="rect">
+            <a:avLst/>
+          </a:prstGeom>
+          <a:noFill/>
+        </p:spPr>
+        <p:txBody>
+          <a:bodyPr wrap="square" lIns="18288" rIns="18288" tIns="18288" bIns="18288" anchor="ctr"/>
+          <a:lstStyle/>
+          <a:p>
+            <a:pPr algn="l">
+              <a:lnSpc>
+                <a:spcPct val="115000"/>
+              </a:lnSpc>
+              <a:spcBef>
+                <a:spcPts val="0"/>
+              </a:spcBef>
+              <a:spcAft>
+                <a:spcPts val="200"/>
+              </a:spcAft>
+            </a:pPr>
+            <a:r>
+              <a:rPr sz="1600" b="0">
+                <a:solidFill>
+                  <a:srgbClr val="161B22"/>
+                </a:solidFill>
+                <a:latin typeface="Microsoft YaHei"/>
+                <a:ea typeface="Microsoft YaHei"/>
+                <a:cs typeface="Microsoft YaHei"/>
+              </a:rPr>
+              <a:t>Prefill 把 prompt 的历史 KV 交给 decode。这些 K、V 的数值到这里已经定稿。</a:t>
+            </a:r>
+          </a:p>
+        </p:txBody>
+      </p:sp>
+      <p:sp>
+        <p:nvSpPr>
+          <p:cNvPr id="17" name="Rectangle 16"/>
+          <p:cNvSpPr/>
+          <p:nvPr/>
+        </p:nvSpPr>
+        <p:spPr>
+          <a:xfrm>
+            <a:off x="438912" y="2896362"/>
+            <a:ext cx="11314175" cy="1122426"/>
+          </a:xfrm>
+          <a:prstGeom prst="rect">
+            <a:avLst/>
+          </a:prstGeom>
+          <a:solidFill>
+            <a:srgbClr val="FFFFFF"/>
+          </a:solidFill>
+          <a:ln w="12700">
+            <a:solidFill>
+              <a:srgbClr val="D6DDE5"/>
+            </a:solidFill>
+          </a:ln>
+        </p:spPr>
+        <p:style>
+          <a:lnRef idx="1">
+            <a:schemeClr val="accent1"/>
+          </a:lnRef>
+          <a:fillRef idx="3">
+            <a:schemeClr val="accent1"/>
+          </a:fillRef>
+          <a:effectRef idx="2">
+            <a:schemeClr val="accent1"/>
+          </a:effectRef>
+          <a:fontRef idx="minor">
+            <a:schemeClr val="lt1"/>
+          </a:fontRef>
+        </p:style>
+        <p:txBody>
+          <a:bodyPr rtlCol="0" anchor="ctr"/>
+          <a:lstStyle/>
+          <a:p>
+            <a:pPr algn="ctr"/>
+          </a:p>
+        </p:txBody>
+      </p:sp>
+      <p:sp>
+        <p:nvSpPr>
+          <p:cNvPr id="18" name="Rectangle 17"/>
+          <p:cNvSpPr/>
+          <p:nvPr/>
+        </p:nvSpPr>
+        <p:spPr>
+          <a:xfrm>
+            <a:off x="438912" y="2896362"/>
+            <a:ext cx="73152" cy="1122426"/>
+          </a:xfrm>
+          <a:prstGeom prst="rect">
+            <a:avLst/>
+          </a:prstGeom>
+          <a:solidFill>
+            <a:srgbClr val="606A76"/>
+          </a:solidFill>
+          <a:ln>
+            <a:noFill/>
+          </a:ln>
+        </p:spPr>
+        <p:style>
+          <a:lnRef idx="1">
+            <a:schemeClr val="accent1"/>
+          </a:lnRef>
+          <a:fillRef idx="3">
+            <a:schemeClr val="accent1"/>
+          </a:fillRef>
+          <a:effectRef idx="2">
+            <a:schemeClr val="accent1"/>
+          </a:effectRef>
+          <a:fontRef idx="minor">
+            <a:schemeClr val="lt1"/>
+          </a:fontRef>
+        </p:style>
+        <p:txBody>
+          <a:bodyPr rtlCol="0" anchor="ctr"/>
+          <a:lstStyle/>
+          <a:p>
+            <a:pPr algn="ctr"/>
+          </a:p>
+        </p:txBody>
+      </p:sp>
+      <p:sp>
+        <p:nvSpPr>
+          <p:cNvPr id="19" name="Rectangle 18"/>
+          <p:cNvSpPr/>
+          <p:nvPr/>
+        </p:nvSpPr>
+        <p:spPr>
+          <a:xfrm>
+            <a:off x="694944" y="3247263"/>
+            <a:ext cx="420624" cy="420624"/>
+          </a:xfrm>
+          <a:prstGeom prst="rect">
+            <a:avLst/>
+          </a:prstGeom>
+          <a:solidFill>
+            <a:srgbClr val="0E4A8A"/>
+          </a:solidFill>
+          <a:ln>
+            <a:noFill/>
+          </a:ln>
+        </p:spPr>
+        <p:style>
+          <a:lnRef idx="1">
+            <a:schemeClr val="accent1"/>
+          </a:lnRef>
+          <a:fillRef idx="3">
+            <a:schemeClr val="accent1"/>
+          </a:fillRef>
+          <a:effectRef idx="2">
+            <a:schemeClr val="accent1"/>
+          </a:effectRef>
+          <a:fontRef idx="minor">
+            <a:schemeClr val="lt1"/>
+          </a:fontRef>
+        </p:style>
+        <p:txBody>
+          <a:bodyPr rtlCol="0" anchor="ctr"/>
+          <a:lstStyle/>
+          <a:p>
+            <a:pPr algn="ctr"/>
+          </a:p>
+        </p:txBody>
+      </p:sp>
+      <p:sp>
+        <p:nvSpPr>
+          <p:cNvPr id="20" name="TextBox 19"/>
+          <p:cNvSpPr txBox="1"/>
+          <p:nvPr/>
+        </p:nvSpPr>
+        <p:spPr>
+          <a:xfrm>
+            <a:off x="694944" y="3247263"/>
+            <a:ext cx="420624" cy="420624"/>
+          </a:xfrm>
+          <a:prstGeom prst="rect">
+            <a:avLst/>
+          </a:prstGeom>
+          <a:noFill/>
+        </p:spPr>
+        <p:txBody>
+          <a:bodyPr wrap="square" lIns="18288" rIns="18288" tIns="18288" bIns="18288" anchor="ctr"/>
+          <a:lstStyle/>
+          <a:p>
+            <a:pPr algn="ctr">
+              <a:lnSpc>
+                <a:spcPct val="105000"/>
+              </a:lnSpc>
+              <a:spcBef>
+                <a:spcPts val="0"/>
+              </a:spcBef>
+              <a:spcAft>
+                <a:spcPts val="200"/>
+              </a:spcAft>
+            </a:pPr>
+            <a:r>
+              <a:rPr sz="1800" b="1">
+                <a:solidFill>
+                  <a:srgbClr val="FFFFFF"/>
+                </a:solidFill>
+                <a:latin typeface="Microsoft YaHei"/>
+                <a:ea typeface="Microsoft YaHei"/>
+                <a:cs typeface="Microsoft YaHei"/>
+              </a:rPr>
+              <a:t>2</a:t>
+            </a:r>
+          </a:p>
+        </p:txBody>
+      </p:sp>
+      <p:sp>
+        <p:nvSpPr>
+          <p:cNvPr id="21" name="TextBox 20"/>
+          <p:cNvSpPr txBox="1"/>
+          <p:nvPr/>
+        </p:nvSpPr>
+        <p:spPr>
+          <a:xfrm>
+            <a:off x="1261872" y="2896362"/>
+            <a:ext cx="2468880" cy="1122426"/>
+          </a:xfrm>
+          <a:prstGeom prst="rect">
+            <a:avLst/>
+          </a:prstGeom>
+          <a:noFill/>
+        </p:spPr>
+        <p:txBody>
+          <a:bodyPr wrap="square" lIns="18288" rIns="18288" tIns="18288" bIns="18288" anchor="ctr"/>
+          <a:lstStyle/>
+          <a:p>
+            <a:pPr algn="l">
+              <a:lnSpc>
+                <a:spcPct val="105000"/>
+              </a:lnSpc>
+              <a:spcBef>
+                <a:spcPts val="0"/>
+              </a:spcBef>
+              <a:spcAft>
+                <a:spcPts val="200"/>
+              </a:spcAft>
+            </a:pPr>
+            <a:r>
+              <a:rPr sz="1800" b="1">
+                <a:solidFill>
+                  <a:srgbClr val="161B22"/>
+                </a:solidFill>
+                <a:latin typeface="Microsoft YaHei"/>
+                <a:ea typeface="Microsoft YaHei"/>
+                <a:cs typeface="Microsoft YaHei"/>
+              </a:rPr>
+              <a:t>第一个 token</a:t>
+            </a:r>
+          </a:p>
+          <a:p>
+            <a:pPr algn="l">
+              <a:lnSpc>
+                <a:spcPct val="105000"/>
+              </a:lnSpc>
+              <a:spcBef>
+                <a:spcPts val="0"/>
+              </a:spcBef>
+              <a:spcAft>
+                <a:spcPts val="200"/>
+              </a:spcAft>
+            </a:pPr>
+            <a:r>
+              <a:rPr sz="1300" b="1">
+                <a:solidFill>
+                  <a:srgbClr val="58626E"/>
+                </a:solidFill>
+                <a:latin typeface="Microsoft YaHei"/>
+                <a:ea typeface="Microsoft YaHei"/>
+                <a:cs typeface="Microsoft YaHei"/>
+              </a:rPr>
+              <a:t>TTFT</a:t>
+            </a:r>
+          </a:p>
+        </p:txBody>
+      </p:sp>
+      <p:sp>
+        <p:nvSpPr>
+          <p:cNvPr id="22" name="TextBox 21"/>
+          <p:cNvSpPr txBox="1"/>
+          <p:nvPr/>
+        </p:nvSpPr>
+        <p:spPr>
+          <a:xfrm>
+            <a:off x="3822191" y="2896362"/>
+            <a:ext cx="7748015" cy="1122426"/>
+          </a:xfrm>
+          <a:prstGeom prst="rect">
+            <a:avLst/>
+          </a:prstGeom>
+          <a:noFill/>
+        </p:spPr>
+        <p:txBody>
+          <a:bodyPr wrap="square" lIns="18288" rIns="18288" tIns="18288" bIns="18288" anchor="ctr"/>
+          <a:lstStyle/>
+          <a:p>
+            <a:pPr algn="l">
+              <a:lnSpc>
+                <a:spcPct val="115000"/>
+              </a:lnSpc>
+              <a:spcBef>
+                <a:spcPts val="0"/>
+              </a:spcBef>
+              <a:spcAft>
+                <a:spcPts val="200"/>
+              </a:spcAft>
+            </a:pPr>
+            <a:r>
+              <a:rPr sz="1600" b="0">
+                <a:solidFill>
+                  <a:srgbClr val="161B22"/>
+                </a:solidFill>
+                <a:latin typeface="Microsoft YaHei"/>
+                <a:ea typeface="Microsoft YaHei"/>
+                <a:cs typeface="Microsoft YaHei"/>
+              </a:rPr>
+              <a:t>读 HBM 里的历史 KV，算出这个 token，把增量 KV 写回 HBM。这时若还要从池里取缺页，仍记在 TTFT。</a:t>
+            </a:r>
+          </a:p>
+        </p:txBody>
+      </p:sp>
+      <p:sp>
+        <p:nvSpPr>
+          <p:cNvPr id="23" name="Rectangle 22"/>
+          <p:cNvSpPr/>
+          <p:nvPr/>
+        </p:nvSpPr>
+        <p:spPr>
+          <a:xfrm>
+            <a:off x="438912" y="4110228"/>
+            <a:ext cx="11314175" cy="1122426"/>
+          </a:xfrm>
+          <a:prstGeom prst="rect">
+            <a:avLst/>
+          </a:prstGeom>
+          <a:solidFill>
+            <a:srgbClr val="FFFFFF"/>
+          </a:solidFill>
+          <a:ln w="12700">
+            <a:solidFill>
+              <a:srgbClr val="D6DDE5"/>
+            </a:solidFill>
+          </a:ln>
+        </p:spPr>
+        <p:style>
+          <a:lnRef idx="1">
+            <a:schemeClr val="accent1"/>
+          </a:lnRef>
+          <a:fillRef idx="3">
+            <a:schemeClr val="accent1"/>
+          </a:fillRef>
+          <a:effectRef idx="2">
+            <a:schemeClr val="accent1"/>
+          </a:effectRef>
+          <a:fontRef idx="minor">
+            <a:schemeClr val="lt1"/>
+          </a:fontRef>
+        </p:style>
+        <p:txBody>
+          <a:bodyPr rtlCol="0" anchor="ctr"/>
+          <a:lstStyle/>
+          <a:p>
+            <a:pPr algn="ctr"/>
+          </a:p>
+        </p:txBody>
+      </p:sp>
+      <p:sp>
+        <p:nvSpPr>
+          <p:cNvPr id="24" name="Rectangle 23"/>
+          <p:cNvSpPr/>
+          <p:nvPr/>
+        </p:nvSpPr>
+        <p:spPr>
+          <a:xfrm>
+            <a:off x="438912" y="4110228"/>
+            <a:ext cx="73152" cy="1122426"/>
+          </a:xfrm>
+          <a:prstGeom prst="rect">
+            <a:avLst/>
+          </a:prstGeom>
+          <a:solidFill>
+            <a:srgbClr val="0E4A8A"/>
+          </a:solidFill>
+          <a:ln>
+            <a:noFill/>
+          </a:ln>
+        </p:spPr>
+        <p:style>
+          <a:lnRef idx="1">
+            <a:schemeClr val="accent1"/>
+          </a:lnRef>
+          <a:fillRef idx="3">
+            <a:schemeClr val="accent1"/>
+          </a:fillRef>
+          <a:effectRef idx="2">
+            <a:schemeClr val="accent1"/>
+          </a:effectRef>
+          <a:fontRef idx="minor">
+            <a:schemeClr val="lt1"/>
+          </a:fontRef>
+        </p:style>
+        <p:txBody>
+          <a:bodyPr rtlCol="0" anchor="ctr"/>
+          <a:lstStyle/>
+          <a:p>
+            <a:pPr algn="ctr"/>
+          </a:p>
+        </p:txBody>
+      </p:sp>
+      <p:sp>
+        <p:nvSpPr>
+          <p:cNvPr id="25" name="Rectangle 24"/>
+          <p:cNvSpPr/>
+          <p:nvPr/>
+        </p:nvSpPr>
+        <p:spPr>
+          <a:xfrm>
+            <a:off x="694944" y="4461129"/>
+            <a:ext cx="420624" cy="420624"/>
+          </a:xfrm>
+          <a:prstGeom prst="rect">
+            <a:avLst/>
+          </a:prstGeom>
+          <a:solidFill>
+            <a:srgbClr val="0E4A8A"/>
+          </a:solidFill>
+          <a:ln>
+            <a:noFill/>
+          </a:ln>
+        </p:spPr>
+        <p:style>
+          <a:lnRef idx="1">
+            <a:schemeClr val="accent1"/>
+          </a:lnRef>
+          <a:fillRef idx="3">
+            <a:schemeClr val="accent1"/>
+          </a:fillRef>
+          <a:effectRef idx="2">
+            <a:schemeClr val="accent1"/>
+          </a:effectRef>
+          <a:fontRef idx="minor">
+            <a:schemeClr val="lt1"/>
+          </a:fontRef>
+        </p:style>
+        <p:txBody>
+          <a:bodyPr rtlCol="0" anchor="ctr"/>
+          <a:lstStyle/>
+          <a:p>
+            <a:pPr algn="ctr"/>
+          </a:p>
+        </p:txBody>
+      </p:sp>
+      <p:sp>
+        <p:nvSpPr>
+          <p:cNvPr id="26" name="TextBox 25"/>
+          <p:cNvSpPr txBox="1"/>
+          <p:nvPr/>
+        </p:nvSpPr>
+        <p:spPr>
+          <a:xfrm>
+            <a:off x="694944" y="4461129"/>
+            <a:ext cx="420624" cy="420624"/>
+          </a:xfrm>
+          <a:prstGeom prst="rect">
+            <a:avLst/>
+          </a:prstGeom>
+          <a:noFill/>
+        </p:spPr>
+        <p:txBody>
+          <a:bodyPr wrap="square" lIns="18288" rIns="18288" tIns="18288" bIns="18288" anchor="ctr"/>
+          <a:lstStyle/>
+          <a:p>
+            <a:pPr algn="ctr">
+              <a:lnSpc>
+                <a:spcPct val="105000"/>
+              </a:lnSpc>
+              <a:spcBef>
+                <a:spcPts val="0"/>
+              </a:spcBef>
+              <a:spcAft>
+                <a:spcPts val="200"/>
+              </a:spcAft>
+            </a:pPr>
+            <a:r>
+              <a:rPr sz="1800" b="1">
+                <a:solidFill>
+                  <a:srgbClr val="FFFFFF"/>
+                </a:solidFill>
+                <a:latin typeface="Microsoft YaHei"/>
+                <a:ea typeface="Microsoft YaHei"/>
+                <a:cs typeface="Microsoft YaHei"/>
+              </a:rPr>
+              <a:t>3</a:t>
+            </a:r>
+          </a:p>
+        </p:txBody>
+      </p:sp>
+      <p:sp>
+        <p:nvSpPr>
+          <p:cNvPr id="27" name="TextBox 26"/>
+          <p:cNvSpPr txBox="1"/>
+          <p:nvPr/>
+        </p:nvSpPr>
+        <p:spPr>
+          <a:xfrm>
+            <a:off x="1261872" y="4110228"/>
+            <a:ext cx="2468880" cy="1122426"/>
+          </a:xfrm>
+          <a:prstGeom prst="rect">
+            <a:avLst/>
+          </a:prstGeom>
+          <a:noFill/>
+        </p:spPr>
+        <p:txBody>
+          <a:bodyPr wrap="square" lIns="18288" rIns="18288" tIns="18288" bIns="18288" anchor="ctr"/>
+          <a:lstStyle/>
+          <a:p>
+            <a:pPr algn="l">
+              <a:lnSpc>
+                <a:spcPct val="105000"/>
+              </a:lnSpc>
+              <a:spcBef>
+                <a:spcPts val="0"/>
+              </a:spcBef>
+              <a:spcAft>
+                <a:spcPts val="200"/>
+              </a:spcAft>
+            </a:pPr>
+            <a:r>
+              <a:rPr sz="1800" b="1">
+                <a:solidFill>
+                  <a:srgbClr val="161B22"/>
+                </a:solidFill>
+                <a:latin typeface="Microsoft YaHei"/>
+                <a:ea typeface="Microsoft YaHei"/>
+                <a:cs typeface="Microsoft YaHei"/>
+              </a:rPr>
+              <a:t>后续每个 token</a:t>
+            </a:r>
+          </a:p>
+          <a:p>
+            <a:pPr algn="l">
+              <a:lnSpc>
+                <a:spcPct val="105000"/>
+              </a:lnSpc>
+              <a:spcBef>
+                <a:spcPts val="0"/>
+              </a:spcBef>
+              <a:spcAft>
+                <a:spcPts val="200"/>
+              </a:spcAft>
+            </a:pPr>
+            <a:r>
+              <a:rPr sz="1300" b="1">
+                <a:solidFill>
+                  <a:srgbClr val="0E4A8A"/>
+                </a:solidFill>
+                <a:latin typeface="Microsoft YaHei"/>
+                <a:ea typeface="Microsoft YaHei"/>
+                <a:cs typeface="Microsoft YaHei"/>
+              </a:rPr>
+              <a:t>TPOT</a:t>
+            </a:r>
+          </a:p>
+        </p:txBody>
+      </p:sp>
+      <p:sp>
+        <p:nvSpPr>
+          <p:cNvPr id="28" name="TextBox 27"/>
+          <p:cNvSpPr txBox="1"/>
+          <p:nvPr/>
+        </p:nvSpPr>
+        <p:spPr>
+          <a:xfrm>
+            <a:off x="3822191" y="4110228"/>
+            <a:ext cx="7748015" cy="1122426"/>
+          </a:xfrm>
+          <a:prstGeom prst="rect">
+            <a:avLst/>
+          </a:prstGeom>
+          <a:noFill/>
+        </p:spPr>
+        <p:txBody>
+          <a:bodyPr wrap="square" lIns="18288" rIns="18288" tIns="18288" bIns="18288" anchor="ctr"/>
+          <a:lstStyle/>
+          <a:p>
+            <a:pPr algn="l">
+              <a:lnSpc>
+                <a:spcPct val="115000"/>
+              </a:lnSpc>
+              <a:spcBef>
+                <a:spcPts val="0"/>
+              </a:spcBef>
+              <a:spcAft>
+                <a:spcPts val="200"/>
+              </a:spcAft>
+            </a:pPr>
+            <a:r>
+              <a:rPr sz="1600" b="0">
+                <a:solidFill>
+                  <a:srgbClr val="161B22"/>
+                </a:solidFill>
+                <a:latin typeface="Microsoft YaHei"/>
+                <a:ea typeface="Microsoft YaHei"/>
+                <a:cs typeface="Microsoft YaHei"/>
+              </a:rPr>
+              <a:t>用新的 Q 重读全部历史 KV。留在 HBM 的读 HBM，不在的读池。被驱逐的页下一步还要再读。</a:t>
+            </a:r>
+          </a:p>
+        </p:txBody>
+      </p:sp>
+      <p:sp>
+        <p:nvSpPr>
+          <p:cNvPr id="29" name="Rectangle 28"/>
+          <p:cNvSpPr/>
+          <p:nvPr/>
+        </p:nvSpPr>
+        <p:spPr>
+          <a:xfrm>
+            <a:off x="438912" y="5324094"/>
+            <a:ext cx="11314175" cy="1122426"/>
+          </a:xfrm>
+          <a:prstGeom prst="rect">
+            <a:avLst/>
+          </a:prstGeom>
+          <a:solidFill>
+            <a:srgbClr val="FFFFFF"/>
+          </a:solidFill>
+          <a:ln w="12700">
+            <a:solidFill>
+              <a:srgbClr val="D6DDE5"/>
+            </a:solidFill>
+          </a:ln>
+        </p:spPr>
+        <p:style>
+          <a:lnRef idx="1">
+            <a:schemeClr val="accent1"/>
+          </a:lnRef>
+          <a:fillRef idx="3">
+            <a:schemeClr val="accent1"/>
+          </a:fillRef>
+          <a:effectRef idx="2">
+            <a:schemeClr val="accent1"/>
+          </a:effectRef>
+          <a:fontRef idx="minor">
+            <a:schemeClr val="lt1"/>
+          </a:fontRef>
+        </p:style>
+        <p:txBody>
+          <a:bodyPr rtlCol="0" anchor="ctr"/>
+          <a:lstStyle/>
+          <a:p>
+            <a:pPr algn="ctr"/>
+          </a:p>
+        </p:txBody>
+      </p:sp>
+      <p:sp>
+        <p:nvSpPr>
+          <p:cNvPr id="30" name="Rectangle 29"/>
+          <p:cNvSpPr/>
+          <p:nvPr/>
+        </p:nvSpPr>
+        <p:spPr>
+          <a:xfrm>
+            <a:off x="438912" y="5324094"/>
+            <a:ext cx="73152" cy="1122426"/>
+          </a:xfrm>
+          <a:prstGeom prst="rect">
+            <a:avLst/>
+          </a:prstGeom>
+          <a:solidFill>
+            <a:srgbClr val="0E4A8A"/>
+          </a:solidFill>
+          <a:ln>
+            <a:noFill/>
+          </a:ln>
+        </p:spPr>
+        <p:style>
+          <a:lnRef idx="1">
+            <a:schemeClr val="accent1"/>
+          </a:lnRef>
+          <a:fillRef idx="3">
+            <a:schemeClr val="accent1"/>
+          </a:fillRef>
+          <a:effectRef idx="2">
+            <a:schemeClr val="accent1"/>
+          </a:effectRef>
+          <a:fontRef idx="minor">
+            <a:schemeClr val="lt1"/>
+          </a:fontRef>
+        </p:style>
+        <p:txBody>
+          <a:bodyPr rtlCol="0" anchor="ctr"/>
+          <a:lstStyle/>
+          <a:p>
+            <a:pPr algn="ctr"/>
+          </a:p>
+        </p:txBody>
+      </p:sp>
+      <p:sp>
+        <p:nvSpPr>
+          <p:cNvPr id="31" name="Rectangle 30"/>
+          <p:cNvSpPr/>
+          <p:nvPr/>
+        </p:nvSpPr>
+        <p:spPr>
+          <a:xfrm>
+            <a:off x="694944" y="5674995"/>
+            <a:ext cx="420624" cy="420624"/>
+          </a:xfrm>
+          <a:prstGeom prst="rect">
+            <a:avLst/>
+          </a:prstGeom>
+          <a:solidFill>
+            <a:srgbClr val="0E4A8A"/>
+          </a:solidFill>
+          <a:ln>
+            <a:noFill/>
+          </a:ln>
+        </p:spPr>
+        <p:style>
+          <a:lnRef idx="1">
+            <a:schemeClr val="accent1"/>
+          </a:lnRef>
+          <a:fillRef idx="3">
+            <a:schemeClr val="accent1"/>
+          </a:fillRef>
+          <a:effectRef idx="2">
+            <a:schemeClr val="accent1"/>
+          </a:effectRef>
+          <a:fontRef idx="minor">
+            <a:schemeClr val="lt1"/>
+          </a:fontRef>
+        </p:style>
+        <p:txBody>
+          <a:bodyPr rtlCol="0" anchor="ctr"/>
+          <a:lstStyle/>
+          <a:p>
+            <a:pPr algn="ctr"/>
+          </a:p>
+        </p:txBody>
+      </p:sp>
+      <p:sp>
+        <p:nvSpPr>
+          <p:cNvPr id="32" name="TextBox 31"/>
+          <p:cNvSpPr txBox="1"/>
+          <p:nvPr/>
+        </p:nvSpPr>
+        <p:spPr>
+          <a:xfrm>
+            <a:off x="694944" y="5674995"/>
+            <a:ext cx="420624" cy="420624"/>
+          </a:xfrm>
+          <a:prstGeom prst="rect">
+            <a:avLst/>
+          </a:prstGeom>
+          <a:noFill/>
+        </p:spPr>
+        <p:txBody>
+          <a:bodyPr wrap="square" lIns="18288" rIns="18288" tIns="18288" bIns="18288" anchor="ctr"/>
+          <a:lstStyle/>
+          <a:p>
+            <a:pPr algn="ctr">
+              <a:lnSpc>
+                <a:spcPct val="105000"/>
+              </a:lnSpc>
+              <a:spcBef>
+                <a:spcPts val="0"/>
+              </a:spcBef>
+              <a:spcAft>
+                <a:spcPts val="200"/>
+              </a:spcAft>
+            </a:pPr>
+            <a:r>
+              <a:rPr sz="1800" b="1">
+                <a:solidFill>
+                  <a:srgbClr val="FFFFFF"/>
+                </a:solidFill>
+                <a:latin typeface="Microsoft YaHei"/>
+                <a:ea typeface="Microsoft YaHei"/>
+                <a:cs typeface="Microsoft YaHei"/>
+              </a:rPr>
+              <a:t>4</a:t>
+            </a:r>
+          </a:p>
+        </p:txBody>
+      </p:sp>
+      <p:sp>
+        <p:nvSpPr>
+          <p:cNvPr id="33" name="TextBox 32"/>
+          <p:cNvSpPr txBox="1"/>
+          <p:nvPr/>
+        </p:nvSpPr>
+        <p:spPr>
+          <a:xfrm>
+            <a:off x="1261872" y="5324094"/>
+            <a:ext cx="2468880" cy="1122426"/>
+          </a:xfrm>
+          <a:prstGeom prst="rect">
+            <a:avLst/>
+          </a:prstGeom>
+          <a:noFill/>
+        </p:spPr>
+        <p:txBody>
+          <a:bodyPr wrap="square" lIns="18288" rIns="18288" tIns="18288" bIns="18288" anchor="ctr"/>
+          <a:lstStyle/>
+          <a:p>
+            <a:pPr algn="l">
+              <a:lnSpc>
+                <a:spcPct val="105000"/>
+              </a:lnSpc>
+              <a:spcBef>
+                <a:spcPts val="0"/>
+              </a:spcBef>
+              <a:spcAft>
+                <a:spcPts val="200"/>
+              </a:spcAft>
+            </a:pPr>
+            <a:r>
+              <a:rPr sz="1800" b="1">
+                <a:solidFill>
+                  <a:srgbClr val="161B22"/>
+                </a:solidFill>
+                <a:latin typeface="Microsoft YaHei"/>
+                <a:ea typeface="Microsoft YaHei"/>
+                <a:cs typeface="Microsoft YaHei"/>
+              </a:rPr>
+              <a:t>逐层重叠</a:t>
+            </a:r>
+          </a:p>
+          <a:p>
+            <a:pPr algn="l">
+              <a:lnSpc>
+                <a:spcPct val="105000"/>
+              </a:lnSpc>
+              <a:spcBef>
+                <a:spcPts val="0"/>
+              </a:spcBef>
+              <a:spcAft>
+                <a:spcPts val="200"/>
+              </a:spcAft>
+            </a:pPr>
+            <a:r>
+              <a:rPr sz="1300" b="1">
+                <a:solidFill>
+                  <a:srgbClr val="0E4A8A"/>
+                </a:solidFill>
+                <a:latin typeface="Microsoft YaHei"/>
+                <a:ea typeface="Microsoft YaHei"/>
+                <a:cs typeface="Microsoft YaHei"/>
+              </a:rPr>
+              <a:t>TPOT</a:t>
+            </a:r>
+          </a:p>
+        </p:txBody>
+      </p:sp>
+      <p:sp>
+        <p:nvSpPr>
+          <p:cNvPr id="34" name="TextBox 33"/>
+          <p:cNvSpPr txBox="1"/>
+          <p:nvPr/>
+        </p:nvSpPr>
+        <p:spPr>
+          <a:xfrm>
+            <a:off x="3822191" y="5324094"/>
+            <a:ext cx="7748015" cy="1122426"/>
+          </a:xfrm>
+          <a:prstGeom prst="rect">
+            <a:avLst/>
+          </a:prstGeom>
+          <a:noFill/>
+        </p:spPr>
+        <p:txBody>
+          <a:bodyPr wrap="square" lIns="18288" rIns="18288" tIns="18288" bIns="18288" anchor="ctr"/>
+          <a:lstStyle/>
+          <a:p>
+            <a:pPr algn="l">
+              <a:lnSpc>
+                <a:spcPct val="115000"/>
+              </a:lnSpc>
+              <a:spcBef>
+                <a:spcPts val="0"/>
+              </a:spcBef>
+              <a:spcAft>
+                <a:spcPts val="200"/>
+              </a:spcAft>
+            </a:pPr>
+            <a:r>
+              <a:rPr sz="1600" b="0">
+                <a:solidFill>
+                  <a:srgbClr val="161B22"/>
+                </a:solidFill>
+                <a:latin typeface="Microsoft YaHei"/>
+                <a:ea typeface="Microsoft YaHei"/>
+                <a:cs typeface="Microsoft YaHei"/>
+              </a:rPr>
+              <a:t>下一层的取数可以盖在当前层计算下面。不超过计算，池子只占带宽；超出的部分加进这一步。</a:t>
+            </a:r>
+          </a:p>
+        </p:txBody>
+      </p:sp>
     </p:spTree>
   </p:cSld>
   <p:clrMapOvr>
@@ -3176,30 +5882,1376 @@
         <p:nvPr/>
       </p:nvGrpSpPr>
       <p:grpSpPr/>
-      <p:pic>
-        <p:nvPicPr>
-          <p:cNvPr id="2" name="Picture 1" descr="03.png"/>
-          <p:cNvPicPr>
-            <a:picLocks noChangeAspect="1"/>
-          </p:cNvPicPr>
-          <p:nvPr/>
-        </p:nvPicPr>
-        <p:blipFill>
-          <a:blip r:embed="rId2"/>
-          <a:stretch>
-            <a:fillRect/>
-          </a:stretch>
-        </p:blipFill>
+      <p:sp>
+        <p:nvSpPr>
+          <p:cNvPr id="2" name="Rectangle 1"/>
+          <p:cNvSpPr/>
+          <p:nvPr/>
+        </p:nvSpPr>
         <p:spPr>
           <a:xfrm>
             <a:off x="0" y="0"/>
-            <a:ext cx="12191999" cy="6858000"/>
-          </a:xfrm>
-          <a:prstGeom prst="rect">
-            <a:avLst/>
-          </a:prstGeom>
-        </p:spPr>
-      </p:pic>
+            <a:ext cx="12191999" cy="73152"/>
+          </a:xfrm>
+          <a:prstGeom prst="rect">
+            <a:avLst/>
+          </a:prstGeom>
+          <a:solidFill>
+            <a:srgbClr val="0E4A8A"/>
+          </a:solidFill>
+          <a:ln>
+            <a:noFill/>
+          </a:ln>
+        </p:spPr>
+        <p:style>
+          <a:lnRef idx="1">
+            <a:schemeClr val="accent1"/>
+          </a:lnRef>
+          <a:fillRef idx="3">
+            <a:schemeClr val="accent1"/>
+          </a:fillRef>
+          <a:effectRef idx="2">
+            <a:schemeClr val="accent1"/>
+          </a:effectRef>
+          <a:fontRef idx="minor">
+            <a:schemeClr val="lt1"/>
+          </a:fontRef>
+        </p:style>
+        <p:txBody>
+          <a:bodyPr rtlCol="0" anchor="ctr"/>
+          <a:lstStyle/>
+          <a:p>
+            <a:pPr algn="ctr"/>
+          </a:p>
+        </p:txBody>
+      </p:sp>
+      <p:sp>
+        <p:nvSpPr>
+          <p:cNvPr id="3" name="TextBox 2"/>
+          <p:cNvSpPr txBox="1"/>
+          <p:nvPr/>
+        </p:nvSpPr>
+        <p:spPr>
+          <a:xfrm>
+            <a:off x="438912" y="146304"/>
+            <a:ext cx="10972800" cy="256032"/>
+          </a:xfrm>
+          <a:prstGeom prst="rect">
+            <a:avLst/>
+          </a:prstGeom>
+          <a:noFill/>
+        </p:spPr>
+        <p:txBody>
+          <a:bodyPr wrap="square" lIns="18288" rIns="18288" tIns="18288" bIns="18288" anchor="ctr"/>
+          <a:lstStyle/>
+          <a:p>
+            <a:pPr algn="l">
+              <a:lnSpc>
+                <a:spcPct val="105000"/>
+              </a:lnSpc>
+              <a:spcBef>
+                <a:spcPts val="0"/>
+              </a:spcBef>
+              <a:spcAft>
+                <a:spcPts val="200"/>
+              </a:spcAft>
+            </a:pPr>
+            <a:r>
+              <a:rPr sz="1300" b="1">
+                <a:solidFill>
+                  <a:srgbClr val="0E4A8A"/>
+                </a:solidFill>
+                <a:latin typeface="Microsoft YaHei"/>
+                <a:ea typeface="Microsoft YaHei"/>
+                <a:cs typeface="Microsoft YaHei"/>
+              </a:rPr>
+              <a:t>判据</a:t>
+            </a:r>
+          </a:p>
+        </p:txBody>
+      </p:sp>
+      <p:sp>
+        <p:nvSpPr>
+          <p:cNvPr id="4" name="TextBox 3"/>
+          <p:cNvSpPr txBox="1"/>
+          <p:nvPr/>
+        </p:nvSpPr>
+        <p:spPr>
+          <a:xfrm>
+            <a:off x="438912" y="384048"/>
+            <a:ext cx="11314175" cy="420624"/>
+          </a:xfrm>
+          <a:prstGeom prst="rect">
+            <a:avLst/>
+          </a:prstGeom>
+          <a:noFill/>
+        </p:spPr>
+        <p:txBody>
+          <a:bodyPr wrap="square" lIns="18288" rIns="18288" tIns="18288" bIns="18288" anchor="ctr"/>
+          <a:lstStyle/>
+          <a:p>
+            <a:pPr algn="l">
+              <a:lnSpc>
+                <a:spcPct val="105000"/>
+              </a:lnSpc>
+              <a:spcBef>
+                <a:spcPts val="0"/>
+              </a:spcBef>
+              <a:spcAft>
+                <a:spcPts val="200"/>
+              </a:spcAft>
+            </a:pPr>
+            <a:r>
+              <a:rPr sz="2600" b="1">
+                <a:solidFill>
+                  <a:srgbClr val="161B22"/>
+                </a:solidFill>
+                <a:latin typeface="Microsoft YaHei"/>
+                <a:ea typeface="Microsoft YaHei"/>
+                <a:cs typeface="Microsoft YaHei"/>
+              </a:rPr>
+              <a:t>接口带宽相同，差别只在单次 IO 有多大</a:t>
+            </a:r>
+          </a:p>
+        </p:txBody>
+      </p:sp>
+      <p:sp>
+        <p:nvSpPr>
+          <p:cNvPr id="5" name="Rectangle 4"/>
+          <p:cNvSpPr/>
+          <p:nvPr/>
+        </p:nvSpPr>
+        <p:spPr>
+          <a:xfrm>
+            <a:off x="438912" y="877824"/>
+            <a:ext cx="11314175" cy="658368"/>
+          </a:xfrm>
+          <a:prstGeom prst="rect">
+            <a:avLst/>
+          </a:prstGeom>
+          <a:solidFill>
+            <a:srgbClr val="F4F7FA"/>
+          </a:solidFill>
+          <a:ln>
+            <a:noFill/>
+          </a:ln>
+        </p:spPr>
+        <p:style>
+          <a:lnRef idx="1">
+            <a:schemeClr val="accent1"/>
+          </a:lnRef>
+          <a:fillRef idx="3">
+            <a:schemeClr val="accent1"/>
+          </a:fillRef>
+          <a:effectRef idx="2">
+            <a:schemeClr val="accent1"/>
+          </a:effectRef>
+          <a:fontRef idx="minor">
+            <a:schemeClr val="lt1"/>
+          </a:fontRef>
+        </p:style>
+        <p:txBody>
+          <a:bodyPr rtlCol="0" anchor="ctr"/>
+          <a:lstStyle/>
+          <a:p>
+            <a:pPr algn="ctr"/>
+          </a:p>
+        </p:txBody>
+      </p:sp>
+      <p:sp>
+        <p:nvSpPr>
+          <p:cNvPr id="6" name="Rectangle 5"/>
+          <p:cNvSpPr/>
+          <p:nvPr/>
+        </p:nvSpPr>
+        <p:spPr>
+          <a:xfrm>
+            <a:off x="438912" y="877824"/>
+            <a:ext cx="73152" cy="658368"/>
+          </a:xfrm>
+          <a:prstGeom prst="rect">
+            <a:avLst/>
+          </a:prstGeom>
+          <a:solidFill>
+            <a:srgbClr val="0E4A8A"/>
+          </a:solidFill>
+          <a:ln>
+            <a:noFill/>
+          </a:ln>
+        </p:spPr>
+        <p:style>
+          <a:lnRef idx="1">
+            <a:schemeClr val="accent1"/>
+          </a:lnRef>
+          <a:fillRef idx="3">
+            <a:schemeClr val="accent1"/>
+          </a:fillRef>
+          <a:effectRef idx="2">
+            <a:schemeClr val="accent1"/>
+          </a:effectRef>
+          <a:fontRef idx="minor">
+            <a:schemeClr val="lt1"/>
+          </a:fontRef>
+        </p:style>
+        <p:txBody>
+          <a:bodyPr rtlCol="0" anchor="ctr"/>
+          <a:lstStyle/>
+          <a:p>
+            <a:pPr algn="ctr"/>
+          </a:p>
+        </p:txBody>
+      </p:sp>
+      <p:sp>
+        <p:nvSpPr>
+          <p:cNvPr id="7" name="TextBox 6"/>
+          <p:cNvSpPr txBox="1"/>
+          <p:nvPr/>
+        </p:nvSpPr>
+        <p:spPr>
+          <a:xfrm>
+            <a:off x="658368" y="877824"/>
+            <a:ext cx="10948415" cy="658368"/>
+          </a:xfrm>
+          <a:prstGeom prst="rect">
+            <a:avLst/>
+          </a:prstGeom>
+          <a:noFill/>
+        </p:spPr>
+        <p:txBody>
+          <a:bodyPr wrap="square" lIns="18288" rIns="18288" tIns="18288" bIns="18288" anchor="ctr"/>
+          <a:lstStyle/>
+          <a:p>
+            <a:pPr algn="l">
+              <a:lnSpc>
+                <a:spcPct val="115000"/>
+              </a:lnSpc>
+              <a:spcBef>
+                <a:spcPts val="0"/>
+              </a:spcBef>
+              <a:spcAft>
+                <a:spcPts val="200"/>
+              </a:spcAft>
+            </a:pPr>
+            <a:r>
+              <a:rPr sz="1500" b="0">
+                <a:solidFill>
+                  <a:srgbClr val="161B22"/>
+                </a:solidFill>
+                <a:latin typeface="Microsoft YaHei"/>
+                <a:ea typeface="Microsoft YaHei"/>
+                <a:cs typeface="Microsoft YaHei"/>
+              </a:rPr>
+              <a:t>长上下文只提供字节数。单次 IO 够大，SSD 与 DDR 的平均时间相同；读变成小页，就必须改用 DDR。</a:t>
+            </a:r>
+          </a:p>
+        </p:txBody>
+      </p:sp>
+      <p:sp>
+        <p:nvSpPr>
+          <p:cNvPr id="8" name="Rectangle 7"/>
+          <p:cNvSpPr/>
+          <p:nvPr/>
+        </p:nvSpPr>
+        <p:spPr>
+          <a:xfrm>
+            <a:off x="438912" y="6547104"/>
+            <a:ext cx="11314175" cy="9144"/>
+          </a:xfrm>
+          <a:prstGeom prst="rect">
+            <a:avLst/>
+          </a:prstGeom>
+          <a:solidFill>
+            <a:srgbClr val="D6DDE5"/>
+          </a:solidFill>
+          <a:ln>
+            <a:noFill/>
+          </a:ln>
+        </p:spPr>
+        <p:style>
+          <a:lnRef idx="1">
+            <a:schemeClr val="accent1"/>
+          </a:lnRef>
+          <a:fillRef idx="3">
+            <a:schemeClr val="accent1"/>
+          </a:fillRef>
+          <a:effectRef idx="2">
+            <a:schemeClr val="accent1"/>
+          </a:effectRef>
+          <a:fontRef idx="minor">
+            <a:schemeClr val="lt1"/>
+          </a:fontRef>
+        </p:style>
+        <p:txBody>
+          <a:bodyPr rtlCol="0" anchor="ctr"/>
+          <a:lstStyle/>
+          <a:p>
+            <a:pPr algn="ctr"/>
+          </a:p>
+        </p:txBody>
+      </p:sp>
+      <p:sp>
+        <p:nvSpPr>
+          <p:cNvPr id="9" name="TextBox 8"/>
+          <p:cNvSpPr txBox="1"/>
+          <p:nvPr/>
+        </p:nvSpPr>
+        <p:spPr>
+          <a:xfrm>
+            <a:off x="438912" y="6583680"/>
+            <a:ext cx="7315200" cy="237744"/>
+          </a:xfrm>
+          <a:prstGeom prst="rect">
+            <a:avLst/>
+          </a:prstGeom>
+          <a:noFill/>
+        </p:spPr>
+        <p:txBody>
+          <a:bodyPr wrap="square" lIns="18288" rIns="18288" tIns="18288" bIns="18288" anchor="ctr"/>
+          <a:lstStyle/>
+          <a:p>
+            <a:pPr algn="l">
+              <a:lnSpc>
+                <a:spcPct val="105000"/>
+              </a:lnSpc>
+              <a:spcBef>
+                <a:spcPts val="0"/>
+              </a:spcBef>
+              <a:spcAft>
+                <a:spcPts val="200"/>
+              </a:spcAft>
+            </a:pPr>
+            <a:r>
+              <a:rPr sz="1200" b="0">
+                <a:solidFill>
+                  <a:srgbClr val="58626E"/>
+                </a:solidFill>
+                <a:latin typeface="Microsoft YaHei"/>
+                <a:ea typeface="Microsoft YaHei"/>
+                <a:cs typeface="Microsoft YaHei"/>
+              </a:rPr>
+              <a:t>Decode KV 池</a:t>
+            </a:r>
+          </a:p>
+        </p:txBody>
+      </p:sp>
+      <p:sp>
+        <p:nvSpPr>
+          <p:cNvPr id="10" name="TextBox 9"/>
+          <p:cNvSpPr txBox="1"/>
+          <p:nvPr/>
+        </p:nvSpPr>
+        <p:spPr>
+          <a:xfrm>
+            <a:off x="10290047" y="6583680"/>
+            <a:ext cx="1463040" cy="237744"/>
+          </a:xfrm>
+          <a:prstGeom prst="rect">
+            <a:avLst/>
+          </a:prstGeom>
+          <a:noFill/>
+        </p:spPr>
+        <p:txBody>
+          <a:bodyPr wrap="square" lIns="18288" rIns="18288" tIns="18288" bIns="18288" anchor="ctr"/>
+          <a:lstStyle/>
+          <a:p>
+            <a:pPr algn="r">
+              <a:lnSpc>
+                <a:spcPct val="105000"/>
+              </a:lnSpc>
+              <a:spcBef>
+                <a:spcPts val="0"/>
+              </a:spcBef>
+              <a:spcAft>
+                <a:spcPts val="200"/>
+              </a:spcAft>
+            </a:pPr>
+            <a:r>
+              <a:rPr sz="1200" b="1">
+                <a:solidFill>
+                  <a:srgbClr val="0E4A8A"/>
+                </a:solidFill>
+                <a:latin typeface="Microsoft YaHei"/>
+                <a:ea typeface="Microsoft YaHei"/>
+                <a:cs typeface="Microsoft YaHei"/>
+              </a:rPr>
+              <a:t>3  /  4</a:t>
+            </a:r>
+          </a:p>
+        </p:txBody>
+      </p:sp>
+      <p:sp>
+        <p:nvSpPr>
+          <p:cNvPr id="11" name="Rectangle 10"/>
+          <p:cNvSpPr/>
+          <p:nvPr/>
+        </p:nvSpPr>
+        <p:spPr>
+          <a:xfrm>
+            <a:off x="438912" y="1682495"/>
+            <a:ext cx="5623560" cy="4764024"/>
+          </a:xfrm>
+          <a:prstGeom prst="rect">
+            <a:avLst/>
+          </a:prstGeom>
+          <a:solidFill>
+            <a:srgbClr val="F4F7FA"/>
+          </a:solidFill>
+          <a:ln>
+            <a:noFill/>
+          </a:ln>
+        </p:spPr>
+        <p:style>
+          <a:lnRef idx="1">
+            <a:schemeClr val="accent1"/>
+          </a:lnRef>
+          <a:fillRef idx="3">
+            <a:schemeClr val="accent1"/>
+          </a:fillRef>
+          <a:effectRef idx="2">
+            <a:schemeClr val="accent1"/>
+          </a:effectRef>
+          <a:fontRef idx="minor">
+            <a:schemeClr val="lt1"/>
+          </a:fontRef>
+        </p:style>
+        <p:txBody>
+          <a:bodyPr rtlCol="0" anchor="ctr"/>
+          <a:lstStyle/>
+          <a:p>
+            <a:pPr algn="ctr"/>
+          </a:p>
+        </p:txBody>
+      </p:sp>
+      <p:sp>
+        <p:nvSpPr>
+          <p:cNvPr id="12" name="TextBox 11"/>
+          <p:cNvSpPr txBox="1"/>
+          <p:nvPr/>
+        </p:nvSpPr>
+        <p:spPr>
+          <a:xfrm>
+            <a:off x="658368" y="1810512"/>
+            <a:ext cx="5257800" cy="329184"/>
+          </a:xfrm>
+          <a:prstGeom prst="rect">
+            <a:avLst/>
+          </a:prstGeom>
+          <a:noFill/>
+        </p:spPr>
+        <p:txBody>
+          <a:bodyPr wrap="square" lIns="18288" rIns="18288" tIns="18288" bIns="18288" anchor="ctr"/>
+          <a:lstStyle/>
+          <a:p>
+            <a:pPr algn="l">
+              <a:lnSpc>
+                <a:spcPct val="105000"/>
+              </a:lnSpc>
+              <a:spcBef>
+                <a:spcPts val="0"/>
+              </a:spcBef>
+              <a:spcAft>
+                <a:spcPts val="200"/>
+              </a:spcAft>
+            </a:pPr>
+            <a:r>
+              <a:rPr sz="1600" b="1">
+                <a:solidFill>
+                  <a:srgbClr val="0E4A8A"/>
+                </a:solidFill>
+                <a:latin typeface="Microsoft YaHei"/>
+                <a:ea typeface="Microsoft YaHei"/>
+                <a:cs typeface="Microsoft YaHei"/>
+              </a:rPr>
+              <a:t>每步访问多少字节</a:t>
+            </a:r>
+          </a:p>
+        </p:txBody>
+      </p:sp>
+      <p:sp>
+        <p:nvSpPr>
+          <p:cNvPr id="13" name="Rectangle 12"/>
+          <p:cNvSpPr/>
+          <p:nvPr/>
+        </p:nvSpPr>
+        <p:spPr>
+          <a:xfrm>
+            <a:off x="658368" y="2212848"/>
+            <a:ext cx="5184648" cy="365759"/>
+          </a:xfrm>
+          <a:prstGeom prst="rect">
+            <a:avLst/>
+          </a:prstGeom>
+          <a:solidFill>
+            <a:srgbClr val="FFFFFF"/>
+          </a:solidFill>
+          <a:ln>
+            <a:noFill/>
+          </a:ln>
+        </p:spPr>
+        <p:style>
+          <a:lnRef idx="1">
+            <a:schemeClr val="accent1"/>
+          </a:lnRef>
+          <a:fillRef idx="3">
+            <a:schemeClr val="accent1"/>
+          </a:fillRef>
+          <a:effectRef idx="2">
+            <a:schemeClr val="accent1"/>
+          </a:effectRef>
+          <a:fontRef idx="minor">
+            <a:schemeClr val="lt1"/>
+          </a:fontRef>
+        </p:style>
+        <p:txBody>
+          <a:bodyPr rtlCol="0" anchor="ctr"/>
+          <a:lstStyle/>
+          <a:p>
+            <a:pPr algn="ctr"/>
+          </a:p>
+        </p:txBody>
+      </p:sp>
+      <p:sp>
+        <p:nvSpPr>
+          <p:cNvPr id="14" name="TextBox 13"/>
+          <p:cNvSpPr txBox="1"/>
+          <p:nvPr/>
+        </p:nvSpPr>
+        <p:spPr>
+          <a:xfrm>
+            <a:off x="768096" y="2212848"/>
+            <a:ext cx="4965192" cy="365759"/>
+          </a:xfrm>
+          <a:prstGeom prst="rect">
+            <a:avLst/>
+          </a:prstGeom>
+          <a:noFill/>
+        </p:spPr>
+        <p:txBody>
+          <a:bodyPr wrap="square" lIns="18288" rIns="18288" tIns="18288" bIns="18288" anchor="ctr"/>
+          <a:lstStyle/>
+          <a:p>
+            <a:pPr algn="l">
+              <a:lnSpc>
+                <a:spcPct val="105000"/>
+              </a:lnSpc>
+              <a:spcBef>
+                <a:spcPts val="0"/>
+              </a:spcBef>
+              <a:spcAft>
+                <a:spcPts val="200"/>
+              </a:spcAft>
+            </a:pPr>
+            <a:r>
+              <a:rPr sz="1400" b="1">
+                <a:solidFill>
+                  <a:srgbClr val="161B22"/>
+                </a:solidFill>
+                <a:latin typeface="Microsoft YaHei"/>
+                <a:ea typeface="Microsoft YaHei"/>
+                <a:cs typeface="Microsoft YaHei"/>
+              </a:rPr>
+              <a:t>每 token KV = 2 × 层数 × KV 头数 × 头维 × 字节</a:t>
+            </a:r>
+          </a:p>
+        </p:txBody>
+      </p:sp>
+      <p:sp>
+        <p:nvSpPr>
+          <p:cNvPr id="15" name="Rectangle 14"/>
+          <p:cNvSpPr/>
+          <p:nvPr/>
+        </p:nvSpPr>
+        <p:spPr>
+          <a:xfrm>
+            <a:off x="658368" y="2651760"/>
+            <a:ext cx="5184648" cy="365759"/>
+          </a:xfrm>
+          <a:prstGeom prst="rect">
+            <a:avLst/>
+          </a:prstGeom>
+          <a:solidFill>
+            <a:srgbClr val="FFFFFF"/>
+          </a:solidFill>
+          <a:ln>
+            <a:noFill/>
+          </a:ln>
+        </p:spPr>
+        <p:style>
+          <a:lnRef idx="1">
+            <a:schemeClr val="accent1"/>
+          </a:lnRef>
+          <a:fillRef idx="3">
+            <a:schemeClr val="accent1"/>
+          </a:fillRef>
+          <a:effectRef idx="2">
+            <a:schemeClr val="accent1"/>
+          </a:effectRef>
+          <a:fontRef idx="minor">
+            <a:schemeClr val="lt1"/>
+          </a:fontRef>
+        </p:style>
+        <p:txBody>
+          <a:bodyPr rtlCol="0" anchor="ctr"/>
+          <a:lstStyle/>
+          <a:p>
+            <a:pPr algn="ctr"/>
+          </a:p>
+        </p:txBody>
+      </p:sp>
+      <p:sp>
+        <p:nvSpPr>
+          <p:cNvPr id="16" name="TextBox 15"/>
+          <p:cNvSpPr txBox="1"/>
+          <p:nvPr/>
+        </p:nvSpPr>
+        <p:spPr>
+          <a:xfrm>
+            <a:off x="768096" y="2651760"/>
+            <a:ext cx="4965192" cy="365759"/>
+          </a:xfrm>
+          <a:prstGeom prst="rect">
+            <a:avLst/>
+          </a:prstGeom>
+          <a:noFill/>
+        </p:spPr>
+        <p:txBody>
+          <a:bodyPr wrap="square" lIns="18288" rIns="18288" tIns="18288" bIns="18288" anchor="ctr"/>
+          <a:lstStyle/>
+          <a:p>
+            <a:pPr algn="l">
+              <a:lnSpc>
+                <a:spcPct val="105000"/>
+              </a:lnSpc>
+              <a:spcBef>
+                <a:spcPts val="0"/>
+              </a:spcBef>
+              <a:spcAft>
+                <a:spcPts val="200"/>
+              </a:spcAft>
+            </a:pPr>
+            <a:r>
+              <a:rPr sz="1400" b="1">
+                <a:solidFill>
+                  <a:srgbClr val="161B22"/>
+                </a:solidFill>
+                <a:latin typeface="Microsoft YaHei"/>
+                <a:ea typeface="Microsoft YaHei"/>
+                <a:cs typeface="Microsoft YaHei"/>
+              </a:rPr>
+              <a:t>单步读取 = 缓存长度 × 每 token KV</a:t>
+            </a:r>
+          </a:p>
+        </p:txBody>
+      </p:sp>
+      <p:sp>
+        <p:nvSpPr>
+          <p:cNvPr id="17" name="Rectangle 16"/>
+          <p:cNvSpPr/>
+          <p:nvPr/>
+        </p:nvSpPr>
+        <p:spPr>
+          <a:xfrm>
+            <a:off x="658368" y="3090672"/>
+            <a:ext cx="5184648" cy="365759"/>
+          </a:xfrm>
+          <a:prstGeom prst="rect">
+            <a:avLst/>
+          </a:prstGeom>
+          <a:solidFill>
+            <a:srgbClr val="FFFFFF"/>
+          </a:solidFill>
+          <a:ln>
+            <a:noFill/>
+          </a:ln>
+        </p:spPr>
+        <p:style>
+          <a:lnRef idx="1">
+            <a:schemeClr val="accent1"/>
+          </a:lnRef>
+          <a:fillRef idx="3">
+            <a:schemeClr val="accent1"/>
+          </a:fillRef>
+          <a:effectRef idx="2">
+            <a:schemeClr val="accent1"/>
+          </a:effectRef>
+          <a:fontRef idx="minor">
+            <a:schemeClr val="lt1"/>
+          </a:fontRef>
+        </p:style>
+        <p:txBody>
+          <a:bodyPr rtlCol="0" anchor="ctr"/>
+          <a:lstStyle/>
+          <a:p>
+            <a:pPr algn="ctr"/>
+          </a:p>
+        </p:txBody>
+      </p:sp>
+      <p:sp>
+        <p:nvSpPr>
+          <p:cNvPr id="18" name="TextBox 17"/>
+          <p:cNvSpPr txBox="1"/>
+          <p:nvPr/>
+        </p:nvSpPr>
+        <p:spPr>
+          <a:xfrm>
+            <a:off x="768096" y="3090672"/>
+            <a:ext cx="4965192" cy="365759"/>
+          </a:xfrm>
+          <a:prstGeom prst="rect">
+            <a:avLst/>
+          </a:prstGeom>
+          <a:noFill/>
+        </p:spPr>
+        <p:txBody>
+          <a:bodyPr wrap="square" lIns="18288" rIns="18288" tIns="18288" bIns="18288" anchor="ctr"/>
+          <a:lstStyle/>
+          <a:p>
+            <a:pPr algn="l">
+              <a:lnSpc>
+                <a:spcPct val="105000"/>
+              </a:lnSpc>
+              <a:spcBef>
+                <a:spcPts val="0"/>
+              </a:spcBef>
+              <a:spcAft>
+                <a:spcPts val="200"/>
+              </a:spcAft>
+            </a:pPr>
+            <a:r>
+              <a:rPr sz="1400" b="1">
+                <a:solidFill>
+                  <a:srgbClr val="161B22"/>
+                </a:solidFill>
+                <a:latin typeface="Microsoft YaHei"/>
+                <a:ea typeface="Microsoft YaHei"/>
+                <a:cs typeface="Microsoft YaHei"/>
+              </a:rPr>
+              <a:t>单步写入 = 每 token KV</a:t>
+            </a:r>
+          </a:p>
+        </p:txBody>
+      </p:sp>
+      <p:sp>
+        <p:nvSpPr>
+          <p:cNvPr id="19" name="Rectangle 18"/>
+          <p:cNvSpPr/>
+          <p:nvPr/>
+        </p:nvSpPr>
+        <p:spPr>
+          <a:xfrm>
+            <a:off x="658368" y="3529584"/>
+            <a:ext cx="5184648" cy="365759"/>
+          </a:xfrm>
+          <a:prstGeom prst="rect">
+            <a:avLst/>
+          </a:prstGeom>
+          <a:solidFill>
+            <a:srgbClr val="FFFFFF"/>
+          </a:solidFill>
+          <a:ln>
+            <a:noFill/>
+          </a:ln>
+        </p:spPr>
+        <p:style>
+          <a:lnRef idx="1">
+            <a:schemeClr val="accent1"/>
+          </a:lnRef>
+          <a:fillRef idx="3">
+            <a:schemeClr val="accent1"/>
+          </a:fillRef>
+          <a:effectRef idx="2">
+            <a:schemeClr val="accent1"/>
+          </a:effectRef>
+          <a:fontRef idx="minor">
+            <a:schemeClr val="lt1"/>
+          </a:fontRef>
+        </p:style>
+        <p:txBody>
+          <a:bodyPr rtlCol="0" anchor="ctr"/>
+          <a:lstStyle/>
+          <a:p>
+            <a:pPr algn="ctr"/>
+          </a:p>
+        </p:txBody>
+      </p:sp>
+      <p:sp>
+        <p:nvSpPr>
+          <p:cNvPr id="20" name="TextBox 19"/>
+          <p:cNvSpPr txBox="1"/>
+          <p:nvPr/>
+        </p:nvSpPr>
+        <p:spPr>
+          <a:xfrm>
+            <a:off x="768096" y="3529584"/>
+            <a:ext cx="4965192" cy="365759"/>
+          </a:xfrm>
+          <a:prstGeom prst="rect">
+            <a:avLst/>
+          </a:prstGeom>
+          <a:noFill/>
+        </p:spPr>
+        <p:txBody>
+          <a:bodyPr wrap="square" lIns="18288" rIns="18288" tIns="18288" bIns="18288" anchor="ctr"/>
+          <a:lstStyle/>
+          <a:p>
+            <a:pPr algn="l">
+              <a:lnSpc>
+                <a:spcPct val="105000"/>
+              </a:lnSpc>
+              <a:spcBef>
+                <a:spcPts val="0"/>
+              </a:spcBef>
+              <a:spcAft>
+                <a:spcPts val="200"/>
+              </a:spcAft>
+            </a:pPr>
+            <a:r>
+              <a:rPr sz="1400" b="1">
+                <a:solidFill>
+                  <a:srgbClr val="161B22"/>
+                </a:solidFill>
+                <a:latin typeface="Microsoft YaHei"/>
+                <a:ea typeface="Microsoft YaHei"/>
+                <a:cs typeface="Microsoft YaHei"/>
+              </a:rPr>
+              <a:t>本步池读取 = 不在 HBM 中的历史 KV</a:t>
+            </a:r>
+          </a:p>
+        </p:txBody>
+      </p:sp>
+      <p:sp>
+        <p:nvSpPr>
+          <p:cNvPr id="21" name="Rectangle 20"/>
+          <p:cNvSpPr/>
+          <p:nvPr/>
+        </p:nvSpPr>
+        <p:spPr>
+          <a:xfrm>
+            <a:off x="658368" y="3968496"/>
+            <a:ext cx="5184648" cy="365759"/>
+          </a:xfrm>
+          <a:prstGeom prst="rect">
+            <a:avLst/>
+          </a:prstGeom>
+          <a:solidFill>
+            <a:srgbClr val="FFFFFF"/>
+          </a:solidFill>
+          <a:ln>
+            <a:noFill/>
+          </a:ln>
+        </p:spPr>
+        <p:style>
+          <a:lnRef idx="1">
+            <a:schemeClr val="accent1"/>
+          </a:lnRef>
+          <a:fillRef idx="3">
+            <a:schemeClr val="accent1"/>
+          </a:fillRef>
+          <a:effectRef idx="2">
+            <a:schemeClr val="accent1"/>
+          </a:effectRef>
+          <a:fontRef idx="minor">
+            <a:schemeClr val="lt1"/>
+          </a:fontRef>
+        </p:style>
+        <p:txBody>
+          <a:bodyPr rtlCol="0" anchor="ctr"/>
+          <a:lstStyle/>
+          <a:p>
+            <a:pPr algn="ctr"/>
+          </a:p>
+        </p:txBody>
+      </p:sp>
+      <p:sp>
+        <p:nvSpPr>
+          <p:cNvPr id="22" name="TextBox 21"/>
+          <p:cNvSpPr txBox="1"/>
+          <p:nvPr/>
+        </p:nvSpPr>
+        <p:spPr>
+          <a:xfrm>
+            <a:off x="768096" y="3968496"/>
+            <a:ext cx="4965192" cy="365759"/>
+          </a:xfrm>
+          <a:prstGeom prst="rect">
+            <a:avLst/>
+          </a:prstGeom>
+          <a:noFill/>
+        </p:spPr>
+        <p:txBody>
+          <a:bodyPr wrap="square" lIns="18288" rIns="18288" tIns="18288" bIns="18288" anchor="ctr"/>
+          <a:lstStyle/>
+          <a:p>
+            <a:pPr algn="l">
+              <a:lnSpc>
+                <a:spcPct val="105000"/>
+              </a:lnSpc>
+              <a:spcBef>
+                <a:spcPts val="0"/>
+              </a:spcBef>
+              <a:spcAft>
+                <a:spcPts val="200"/>
+              </a:spcAft>
+            </a:pPr>
+            <a:r>
+              <a:rPr sz="1400" b="1">
+                <a:solidFill>
+                  <a:srgbClr val="161B22"/>
+                </a:solidFill>
+                <a:latin typeface="Microsoft YaHei"/>
+                <a:ea typeface="Microsoft YaHei"/>
+                <a:cs typeface="Microsoft YaHei"/>
+              </a:rPr>
+              <a:t>单次读取时间 = IO 字节 / 接口带宽 + 介质时延</a:t>
+            </a:r>
+          </a:p>
+        </p:txBody>
+      </p:sp>
+      <p:sp>
+        <p:nvSpPr>
+          <p:cNvPr id="23" name="TextBox 22"/>
+          <p:cNvSpPr txBox="1"/>
+          <p:nvPr/>
+        </p:nvSpPr>
+        <p:spPr>
+          <a:xfrm>
+            <a:off x="658368" y="4462272"/>
+            <a:ext cx="5184648" cy="1929383"/>
+          </a:xfrm>
+          <a:prstGeom prst="rect">
+            <a:avLst/>
+          </a:prstGeom>
+          <a:noFill/>
+        </p:spPr>
+        <p:txBody>
+          <a:bodyPr wrap="square" lIns="18288" rIns="18288" tIns="18288" bIns="18288" anchor="t"/>
+          <a:lstStyle/>
+          <a:p>
+            <a:pPr algn="l">
+              <a:lnSpc>
+                <a:spcPct val="120000"/>
+              </a:lnSpc>
+              <a:spcBef>
+                <a:spcPts val="0"/>
+              </a:spcBef>
+              <a:spcAft>
+                <a:spcPts val="200"/>
+              </a:spcAft>
+            </a:pPr>
+            <a:r>
+              <a:rPr sz="1300" b="0">
+                <a:solidFill>
+                  <a:srgbClr val="58626E"/>
+                </a:solidFill>
+                <a:latin typeface="Microsoft YaHei"/>
+                <a:ea typeface="Microsoft YaHei"/>
+                <a:cs typeface="Microsoft YaHei"/>
+              </a:rPr>
+              <a:t>70B、GQA、BF16：80 层、8 个 KV 头、头维 128。每 token 320KB。缓存 32768 时单步读取 10GB，每层 128MB。历史内容与上一步相同，只多一个 token。</a:t>
+            </a:r>
+          </a:p>
+        </p:txBody>
+      </p:sp>
+      <p:sp>
+        <p:nvSpPr>
+          <p:cNvPr id="24" name="Rectangle 23"/>
+          <p:cNvSpPr/>
+          <p:nvPr/>
+        </p:nvSpPr>
+        <p:spPr>
+          <a:xfrm>
+            <a:off x="6190488" y="1682495"/>
+            <a:ext cx="5562599" cy="2318004"/>
+          </a:xfrm>
+          <a:prstGeom prst="rect">
+            <a:avLst/>
+          </a:prstGeom>
+          <a:solidFill>
+            <a:srgbClr val="ECF3FA"/>
+          </a:solidFill>
+          <a:ln>
+            <a:noFill/>
+          </a:ln>
+        </p:spPr>
+        <p:style>
+          <a:lnRef idx="1">
+            <a:schemeClr val="accent1"/>
+          </a:lnRef>
+          <a:fillRef idx="3">
+            <a:schemeClr val="accent1"/>
+          </a:fillRef>
+          <a:effectRef idx="2">
+            <a:schemeClr val="accent1"/>
+          </a:effectRef>
+          <a:fontRef idx="minor">
+            <a:schemeClr val="lt1"/>
+          </a:fontRef>
+        </p:style>
+        <p:txBody>
+          <a:bodyPr rtlCol="0" anchor="ctr"/>
+          <a:lstStyle/>
+          <a:p>
+            <a:pPr algn="ctr"/>
+          </a:p>
+        </p:txBody>
+      </p:sp>
+      <p:sp>
+        <p:nvSpPr>
+          <p:cNvPr id="25" name="Rectangle 24"/>
+          <p:cNvSpPr/>
+          <p:nvPr/>
+        </p:nvSpPr>
+        <p:spPr>
+          <a:xfrm>
+            <a:off x="6190488" y="1682495"/>
+            <a:ext cx="73152" cy="2318004"/>
+          </a:xfrm>
+          <a:prstGeom prst="rect">
+            <a:avLst/>
+          </a:prstGeom>
+          <a:solidFill>
+            <a:srgbClr val="0E4A8A"/>
+          </a:solidFill>
+          <a:ln>
+            <a:noFill/>
+          </a:ln>
+        </p:spPr>
+        <p:style>
+          <a:lnRef idx="1">
+            <a:schemeClr val="accent1"/>
+          </a:lnRef>
+          <a:fillRef idx="3">
+            <a:schemeClr val="accent1"/>
+          </a:fillRef>
+          <a:effectRef idx="2">
+            <a:schemeClr val="accent1"/>
+          </a:effectRef>
+          <a:fontRef idx="minor">
+            <a:schemeClr val="lt1"/>
+          </a:fontRef>
+        </p:style>
+        <p:txBody>
+          <a:bodyPr rtlCol="0" anchor="ctr"/>
+          <a:lstStyle/>
+          <a:p>
+            <a:pPr algn="ctr"/>
+          </a:p>
+        </p:txBody>
+      </p:sp>
+      <p:sp>
+        <p:nvSpPr>
+          <p:cNvPr id="26" name="TextBox 25"/>
+          <p:cNvSpPr txBox="1"/>
+          <p:nvPr/>
+        </p:nvSpPr>
+        <p:spPr>
+          <a:xfrm>
+            <a:off x="6409944" y="1792224"/>
+            <a:ext cx="5196839" cy="365760"/>
+          </a:xfrm>
+          <a:prstGeom prst="rect">
+            <a:avLst/>
+          </a:prstGeom>
+          <a:noFill/>
+        </p:spPr>
+        <p:txBody>
+          <a:bodyPr wrap="square" lIns="18288" rIns="18288" tIns="18288" bIns="18288" anchor="ctr"/>
+          <a:lstStyle/>
+          <a:p>
+            <a:pPr algn="l">
+              <a:lnSpc>
+                <a:spcPct val="105000"/>
+              </a:lnSpc>
+              <a:spcBef>
+                <a:spcPts val="0"/>
+              </a:spcBef>
+              <a:spcAft>
+                <a:spcPts val="200"/>
+              </a:spcAft>
+            </a:pPr>
+            <a:r>
+              <a:rPr sz="1800" b="1">
+                <a:solidFill>
+                  <a:srgbClr val="0E4A8A"/>
+                </a:solidFill>
+                <a:latin typeface="Microsoft YaHei"/>
+                <a:ea typeface="Microsoft YaHei"/>
+                <a:cs typeface="Microsoft YaHei"/>
+              </a:rPr>
+              <a:t>按层大读，可以用 SSD</a:t>
+            </a:r>
+          </a:p>
+        </p:txBody>
+      </p:sp>
+      <p:sp>
+        <p:nvSpPr>
+          <p:cNvPr id="27" name="TextBox 26"/>
+          <p:cNvSpPr txBox="1"/>
+          <p:nvPr/>
+        </p:nvSpPr>
+        <p:spPr>
+          <a:xfrm>
+            <a:off x="6409944" y="2176272"/>
+            <a:ext cx="5196839" cy="1696212"/>
+          </a:xfrm>
+          <a:prstGeom prst="rect">
+            <a:avLst/>
+          </a:prstGeom>
+          <a:noFill/>
+        </p:spPr>
+        <p:txBody>
+          <a:bodyPr wrap="square" lIns="18288" rIns="18288" tIns="18288" bIns="18288" anchor="t"/>
+          <a:lstStyle/>
+          <a:p>
+            <a:pPr algn="l">
+              <a:lnSpc>
+                <a:spcPct val="120000"/>
+              </a:lnSpc>
+              <a:spcBef>
+                <a:spcPts val="0"/>
+              </a:spcBef>
+              <a:spcAft>
+                <a:spcPts val="200"/>
+              </a:spcAft>
+            </a:pPr>
+            <a:r>
+              <a:rPr sz="1400" b="0">
+                <a:solidFill>
+                  <a:srgbClr val="161B22"/>
+                </a:solidFill>
+                <a:latin typeface="Microsoft YaHei"/>
+                <a:ea typeface="Microsoft YaHei"/>
+                <a:cs typeface="Microsoft YaHei"/>
+              </a:rPr>
+              <a:t>写按一个 token 的小页追加，读按层收成一次区间读。已在 HBM 的部分从区间去掉，长度不超过逐层缓冲，再拆成数 MB 条带。</a:t>
+            </a:r>
+          </a:p>
+          <a:p>
+            <a:pPr algn="l">
+              <a:lnSpc>
+                <a:spcPct val="120000"/>
+              </a:lnSpc>
+              <a:spcBef>
+                <a:spcPts val="0"/>
+              </a:spcBef>
+              <a:spcAft>
+                <a:spcPts val="200"/>
+              </a:spcAft>
+            </a:pPr>
+            <a:r>
+              <a:rPr sz="1400" b="1">
+                <a:solidFill>
+                  <a:srgbClr val="0E4A8A"/>
+                </a:solidFill>
+                <a:latin typeface="Microsoft YaHei"/>
+                <a:ea typeface="Microsoft YaHei"/>
+                <a:cs typeface="Microsoft YaHei"/>
+              </a:rPr>
+              <a:t>50GB/s、时延差 100 微秒时，大约 5MB 以上时延就可忽略。一层 128MB 的大读里，时延只占百分之几。</a:t>
+            </a:r>
+          </a:p>
+        </p:txBody>
+      </p:sp>
+      <p:sp>
+        <p:nvSpPr>
+          <p:cNvPr id="28" name="Rectangle 27"/>
+          <p:cNvSpPr/>
+          <p:nvPr/>
+        </p:nvSpPr>
+        <p:spPr>
+          <a:xfrm>
+            <a:off x="6190488" y="4128515"/>
+            <a:ext cx="5562599" cy="2318004"/>
+          </a:xfrm>
+          <a:prstGeom prst="rect">
+            <a:avLst/>
+          </a:prstGeom>
+          <a:solidFill>
+            <a:srgbClr val="FAF2F1"/>
+          </a:solidFill>
+          <a:ln>
+            <a:noFill/>
+          </a:ln>
+        </p:spPr>
+        <p:style>
+          <a:lnRef idx="1">
+            <a:schemeClr val="accent1"/>
+          </a:lnRef>
+          <a:fillRef idx="3">
+            <a:schemeClr val="accent1"/>
+          </a:fillRef>
+          <a:effectRef idx="2">
+            <a:schemeClr val="accent1"/>
+          </a:effectRef>
+          <a:fontRef idx="minor">
+            <a:schemeClr val="lt1"/>
+          </a:fontRef>
+        </p:style>
+        <p:txBody>
+          <a:bodyPr rtlCol="0" anchor="ctr"/>
+          <a:lstStyle/>
+          <a:p>
+            <a:pPr algn="ctr"/>
+          </a:p>
+        </p:txBody>
+      </p:sp>
+      <p:sp>
+        <p:nvSpPr>
+          <p:cNvPr id="29" name="Rectangle 28"/>
+          <p:cNvSpPr/>
+          <p:nvPr/>
+        </p:nvSpPr>
+        <p:spPr>
+          <a:xfrm>
+            <a:off x="6190488" y="4128515"/>
+            <a:ext cx="73152" cy="2318004"/>
+          </a:xfrm>
+          <a:prstGeom prst="rect">
+            <a:avLst/>
+          </a:prstGeom>
+          <a:solidFill>
+            <a:srgbClr val="8C2A24"/>
+          </a:solidFill>
+          <a:ln>
+            <a:noFill/>
+          </a:ln>
+        </p:spPr>
+        <p:style>
+          <a:lnRef idx="1">
+            <a:schemeClr val="accent1"/>
+          </a:lnRef>
+          <a:fillRef idx="3">
+            <a:schemeClr val="accent1"/>
+          </a:fillRef>
+          <a:effectRef idx="2">
+            <a:schemeClr val="accent1"/>
+          </a:effectRef>
+          <a:fontRef idx="minor">
+            <a:schemeClr val="lt1"/>
+          </a:fontRef>
+        </p:style>
+        <p:txBody>
+          <a:bodyPr rtlCol="0" anchor="ctr"/>
+          <a:lstStyle/>
+          <a:p>
+            <a:pPr algn="ctr"/>
+          </a:p>
+        </p:txBody>
+      </p:sp>
+      <p:sp>
+        <p:nvSpPr>
+          <p:cNvPr id="30" name="TextBox 29"/>
+          <p:cNvSpPr txBox="1"/>
+          <p:nvPr/>
+        </p:nvSpPr>
+        <p:spPr>
+          <a:xfrm>
+            <a:off x="6409944" y="4238244"/>
+            <a:ext cx="5196839" cy="365760"/>
+          </a:xfrm>
+          <a:prstGeom prst="rect">
+            <a:avLst/>
+          </a:prstGeom>
+          <a:noFill/>
+        </p:spPr>
+        <p:txBody>
+          <a:bodyPr wrap="square" lIns="18288" rIns="18288" tIns="18288" bIns="18288" anchor="ctr"/>
+          <a:lstStyle/>
+          <a:p>
+            <a:pPr algn="l">
+              <a:lnSpc>
+                <a:spcPct val="105000"/>
+              </a:lnSpc>
+              <a:spcBef>
+                <a:spcPts val="0"/>
+              </a:spcBef>
+              <a:spcAft>
+                <a:spcPts val="200"/>
+              </a:spcAft>
+            </a:pPr>
+            <a:r>
+              <a:rPr sz="1800" b="1">
+                <a:solidFill>
+                  <a:srgbClr val="8C2A24"/>
+                </a:solidFill>
+                <a:latin typeface="Microsoft YaHei"/>
+                <a:ea typeface="Microsoft YaHei"/>
+                <a:cs typeface="Microsoft YaHei"/>
+              </a:rPr>
+              <a:t>小页或 p99，必须用 DDR</a:t>
+            </a:r>
+          </a:p>
+        </p:txBody>
+      </p:sp>
+      <p:sp>
+        <p:nvSpPr>
+          <p:cNvPr id="31" name="TextBox 30"/>
+          <p:cNvSpPr txBox="1"/>
+          <p:nvPr/>
+        </p:nvSpPr>
+        <p:spPr>
+          <a:xfrm>
+            <a:off x="6409944" y="4622292"/>
+            <a:ext cx="5196839" cy="1696212"/>
+          </a:xfrm>
+          <a:prstGeom prst="rect">
+            <a:avLst/>
+          </a:prstGeom>
+          <a:noFill/>
+        </p:spPr>
+        <p:txBody>
+          <a:bodyPr wrap="square" lIns="18288" rIns="18288" tIns="18288" bIns="18288" anchor="t"/>
+          <a:lstStyle/>
+          <a:p>
+            <a:pPr algn="l">
+              <a:lnSpc>
+                <a:spcPct val="120000"/>
+              </a:lnSpc>
+              <a:spcBef>
+                <a:spcPts val="0"/>
+              </a:spcBef>
+              <a:spcAft>
+                <a:spcPts val="200"/>
+              </a:spcAft>
+            </a:pPr>
+            <a:r>
+              <a:rPr sz="1400" b="0">
+                <a:solidFill>
+                  <a:srgbClr val="161B22"/>
+                </a:solidFill>
+                <a:latin typeface="Microsoft YaHei"/>
+                <a:ea typeface="Microsoft YaHei"/>
+                <a:cs typeface="Microsoft YaHei"/>
+              </a:rPr>
+              <a:t>每层每个 token 约 4KB。32K 上下文一步约 260 万次读，要喂满 50GB/s 需要约每秒 1200 万次。SSD 的随机 IOPS 先到顶。</a:t>
+            </a:r>
+          </a:p>
+          <a:p>
+            <a:pPr algn="l">
+              <a:lnSpc>
+                <a:spcPct val="120000"/>
+              </a:lnSpc>
+              <a:spcBef>
+                <a:spcPts val="0"/>
+              </a:spcBef>
+              <a:spcAft>
+                <a:spcPts val="200"/>
+              </a:spcAft>
+            </a:pPr>
+            <a:r>
+              <a:rPr sz="1400" b="1">
+                <a:solidFill>
+                  <a:srgbClr val="8C2A24"/>
+                </a:solidFill>
+                <a:latin typeface="Microsoft YaHei"/>
+                <a:ea typeface="Microsoft YaHei"/>
+                <a:cs typeface="Microsoft YaHei"/>
+              </a:rPr>
+              <a:t>合同若写 p99，垃圾回收的停顿也不随大流量摊薄。</a:t>
+            </a:r>
+          </a:p>
+        </p:txBody>
+      </p:sp>
     </p:spTree>
   </p:cSld>
   <p:clrMapOvr>
@@ -3218,72 +7270,1670 @@
         <p:nvPr/>
       </p:nvGrpSpPr>
       <p:grpSpPr/>
-      <p:pic>
-        <p:nvPicPr>
-          <p:cNvPr id="2" name="Picture 1" descr="04.png"/>
-          <p:cNvPicPr>
-            <a:picLocks noChangeAspect="1"/>
-          </p:cNvPicPr>
-          <p:nvPr/>
-        </p:nvPicPr>
-        <p:blipFill>
-          <a:blip r:embed="rId2"/>
-          <a:stretch>
-            <a:fillRect/>
-          </a:stretch>
-        </p:blipFill>
+      <p:sp>
+        <p:nvSpPr>
+          <p:cNvPr id="2" name="Rectangle 1"/>
+          <p:cNvSpPr/>
+          <p:nvPr/>
+        </p:nvSpPr>
         <p:spPr>
           <a:xfrm>
             <a:off x="0" y="0"/>
-            <a:ext cx="12191999" cy="6858000"/>
-          </a:xfrm>
-          <a:prstGeom prst="rect">
-            <a:avLst/>
-          </a:prstGeom>
-        </p:spPr>
-      </p:pic>
-    </p:spTree>
-  </p:cSld>
-  <p:clrMapOvr>
-    <a:masterClrMapping/>
-  </p:clrMapOvr>
-</p:sld>
-</file>
-
-<file path=ppt/slides/slide5.xml><?xml version="1.0" encoding="utf-8"?>
-<p:sld xmlns:a="http://schemas.openxmlformats.org/drawingml/2006/main" xmlns:p="http://schemas.openxmlformats.org/presentationml/2006/main" xmlns:r="http://schemas.openxmlformats.org/officeDocument/2006/relationships">
-  <p:cSld>
-    <p:spTree>
-      <p:nvGrpSpPr>
-        <p:cNvPr id="1" name=""/>
-        <p:cNvGrpSpPr/>
-        <p:nvPr/>
-      </p:nvGrpSpPr>
-      <p:grpSpPr/>
-      <p:pic>
-        <p:nvPicPr>
-          <p:cNvPr id="2" name="Picture 1" descr="05.png"/>
-          <p:cNvPicPr>
-            <a:picLocks noChangeAspect="1"/>
-          </p:cNvPicPr>
-          <p:nvPr/>
-        </p:nvPicPr>
-        <p:blipFill>
-          <a:blip r:embed="rId2"/>
-          <a:stretch>
-            <a:fillRect/>
-          </a:stretch>
-        </p:blipFill>
-        <p:spPr>
-          <a:xfrm>
-            <a:off x="0" y="0"/>
-            <a:ext cx="12191999" cy="6858000"/>
-          </a:xfrm>
-          <a:prstGeom prst="rect">
-            <a:avLst/>
-          </a:prstGeom>
-        </p:spPr>
-      </p:pic>
+            <a:ext cx="12191999" cy="73152"/>
+          </a:xfrm>
+          <a:prstGeom prst="rect">
+            <a:avLst/>
+          </a:prstGeom>
+          <a:solidFill>
+            <a:srgbClr val="0E4A8A"/>
+          </a:solidFill>
+          <a:ln>
+            <a:noFill/>
+          </a:ln>
+        </p:spPr>
+        <p:style>
+          <a:lnRef idx="1">
+            <a:schemeClr val="accent1"/>
+          </a:lnRef>
+          <a:fillRef idx="3">
+            <a:schemeClr val="accent1"/>
+          </a:fillRef>
+          <a:effectRef idx="2">
+            <a:schemeClr val="accent1"/>
+          </a:effectRef>
+          <a:fontRef idx="minor">
+            <a:schemeClr val="lt1"/>
+          </a:fontRef>
+        </p:style>
+        <p:txBody>
+          <a:bodyPr rtlCol="0" anchor="ctr"/>
+          <a:lstStyle/>
+          <a:p>
+            <a:pPr algn="ctr"/>
+          </a:p>
+        </p:txBody>
+      </p:sp>
+      <p:sp>
+        <p:nvSpPr>
+          <p:cNvPr id="3" name="TextBox 2"/>
+          <p:cNvSpPr txBox="1"/>
+          <p:nvPr/>
+        </p:nvSpPr>
+        <p:spPr>
+          <a:xfrm>
+            <a:off x="438912" y="146304"/>
+            <a:ext cx="10972800" cy="256032"/>
+          </a:xfrm>
+          <a:prstGeom prst="rect">
+            <a:avLst/>
+          </a:prstGeom>
+          <a:noFill/>
+        </p:spPr>
+        <p:txBody>
+          <a:bodyPr wrap="square" lIns="18288" rIns="18288" tIns="18288" bIns="18288" anchor="ctr"/>
+          <a:lstStyle/>
+          <a:p>
+            <a:pPr algn="l">
+              <a:lnSpc>
+                <a:spcPct val="105000"/>
+              </a:lnSpc>
+              <a:spcBef>
+                <a:spcPts val="0"/>
+              </a:spcBef>
+              <a:spcAft>
+                <a:spcPts val="200"/>
+              </a:spcAft>
+            </a:pPr>
+            <a:r>
+              <a:rPr sz="1300" b="1">
+                <a:solidFill>
+                  <a:srgbClr val="0E4A8A"/>
+                </a:solidFill>
+                <a:latin typeface="Microsoft YaHei"/>
+                <a:ea typeface="Microsoft YaHei"/>
+                <a:cs typeface="Microsoft YaHei"/>
+              </a:rPr>
+              <a:t>总表</a:t>
+            </a:r>
+          </a:p>
+        </p:txBody>
+      </p:sp>
+      <p:sp>
+        <p:nvSpPr>
+          <p:cNvPr id="4" name="TextBox 3"/>
+          <p:cNvSpPr txBox="1"/>
+          <p:nvPr/>
+        </p:nvSpPr>
+        <p:spPr>
+          <a:xfrm>
+            <a:off x="438912" y="384048"/>
+            <a:ext cx="11314175" cy="420624"/>
+          </a:xfrm>
+          <a:prstGeom prst="rect">
+            <a:avLst/>
+          </a:prstGeom>
+          <a:noFill/>
+        </p:spPr>
+        <p:txBody>
+          <a:bodyPr wrap="square" lIns="18288" rIns="18288" tIns="18288" bIns="18288" anchor="ctr"/>
+          <a:lstStyle/>
+          <a:p>
+            <a:pPr algn="l">
+              <a:lnSpc>
+                <a:spcPct val="105000"/>
+              </a:lnSpc>
+              <a:spcBef>
+                <a:spcPts val="0"/>
+              </a:spcBef>
+              <a:spcAft>
+                <a:spcPts val="200"/>
+              </a:spcAft>
+            </a:pPr>
+            <a:r>
+              <a:rPr sz="2600" b="1">
+                <a:solidFill>
+                  <a:srgbClr val="161B22"/>
+                </a:solidFill>
+                <a:latin typeface="Microsoft YaHei"/>
+                <a:ea typeface="Microsoft YaHei"/>
+                <a:cs typeface="Microsoft YaHei"/>
+              </a:rPr>
+              <a:t>先看缺页在不在 TPOT 上，再看这次读能不能喂满接口</a:t>
+            </a:r>
+          </a:p>
+        </p:txBody>
+      </p:sp>
+      <p:sp>
+        <p:nvSpPr>
+          <p:cNvPr id="5" name="Rectangle 4"/>
+          <p:cNvSpPr/>
+          <p:nvPr/>
+        </p:nvSpPr>
+        <p:spPr>
+          <a:xfrm>
+            <a:off x="438912" y="877824"/>
+            <a:ext cx="11314175" cy="658368"/>
+          </a:xfrm>
+          <a:prstGeom prst="rect">
+            <a:avLst/>
+          </a:prstGeom>
+          <a:solidFill>
+            <a:srgbClr val="F4F7FA"/>
+          </a:solidFill>
+          <a:ln>
+            <a:noFill/>
+          </a:ln>
+        </p:spPr>
+        <p:style>
+          <a:lnRef idx="1">
+            <a:schemeClr val="accent1"/>
+          </a:lnRef>
+          <a:fillRef idx="3">
+            <a:schemeClr val="accent1"/>
+          </a:fillRef>
+          <a:effectRef idx="2">
+            <a:schemeClr val="accent1"/>
+          </a:effectRef>
+          <a:fontRef idx="minor">
+            <a:schemeClr val="lt1"/>
+          </a:fontRef>
+        </p:style>
+        <p:txBody>
+          <a:bodyPr rtlCol="0" anchor="ctr"/>
+          <a:lstStyle/>
+          <a:p>
+            <a:pPr algn="ctr"/>
+          </a:p>
+        </p:txBody>
+      </p:sp>
+      <p:sp>
+        <p:nvSpPr>
+          <p:cNvPr id="6" name="Rectangle 5"/>
+          <p:cNvSpPr/>
+          <p:nvPr/>
+        </p:nvSpPr>
+        <p:spPr>
+          <a:xfrm>
+            <a:off x="438912" y="877824"/>
+            <a:ext cx="73152" cy="658368"/>
+          </a:xfrm>
+          <a:prstGeom prst="rect">
+            <a:avLst/>
+          </a:prstGeom>
+          <a:solidFill>
+            <a:srgbClr val="0E4A8A"/>
+          </a:solidFill>
+          <a:ln>
+            <a:noFill/>
+          </a:ln>
+        </p:spPr>
+        <p:style>
+          <a:lnRef idx="1">
+            <a:schemeClr val="accent1"/>
+          </a:lnRef>
+          <a:fillRef idx="3">
+            <a:schemeClr val="accent1"/>
+          </a:fillRef>
+          <a:effectRef idx="2">
+            <a:schemeClr val="accent1"/>
+          </a:effectRef>
+          <a:fontRef idx="minor">
+            <a:schemeClr val="lt1"/>
+          </a:fontRef>
+        </p:style>
+        <p:txBody>
+          <a:bodyPr rtlCol="0" anchor="ctr"/>
+          <a:lstStyle/>
+          <a:p>
+            <a:pPr algn="ctr"/>
+          </a:p>
+        </p:txBody>
+      </p:sp>
+      <p:sp>
+        <p:nvSpPr>
+          <p:cNvPr id="7" name="TextBox 6"/>
+          <p:cNvSpPr txBox="1"/>
+          <p:nvPr/>
+        </p:nvSpPr>
+        <p:spPr>
+          <a:xfrm>
+            <a:off x="658368" y="877824"/>
+            <a:ext cx="10948415" cy="658368"/>
+          </a:xfrm>
+          <a:prstGeom prst="rect">
+            <a:avLst/>
+          </a:prstGeom>
+          <a:noFill/>
+        </p:spPr>
+        <p:txBody>
+          <a:bodyPr wrap="square" lIns="18288" rIns="18288" tIns="18288" bIns="18288" anchor="ctr"/>
+          <a:lstStyle/>
+          <a:p>
+            <a:pPr algn="l">
+              <a:lnSpc>
+                <a:spcPct val="115000"/>
+              </a:lnSpc>
+              <a:spcBef>
+                <a:spcPts val="0"/>
+              </a:spcBef>
+              <a:spcAft>
+                <a:spcPts val="200"/>
+              </a:spcAft>
+            </a:pPr>
+            <a:r>
+              <a:rPr sz="1500" b="0">
+                <a:solidFill>
+                  <a:srgbClr val="161B22"/>
+                </a:solidFill>
+                <a:latin typeface="Microsoft YaHei"/>
+                <a:ea typeface="Microsoft YaHei"/>
+                <a:cs typeface="Microsoft YaHei"/>
+              </a:rPr>
+              <a:t>HBM 装得下就不进池。装不下时，大页连续读且合同看平均，可以用 SSD；小页随机读或要保 p99，必须用 DDR。</a:t>
+            </a:r>
+          </a:p>
+        </p:txBody>
+      </p:sp>
+      <p:sp>
+        <p:nvSpPr>
+          <p:cNvPr id="8" name="Rectangle 7"/>
+          <p:cNvSpPr/>
+          <p:nvPr/>
+        </p:nvSpPr>
+        <p:spPr>
+          <a:xfrm>
+            <a:off x="438912" y="6547104"/>
+            <a:ext cx="11314175" cy="9144"/>
+          </a:xfrm>
+          <a:prstGeom prst="rect">
+            <a:avLst/>
+          </a:prstGeom>
+          <a:solidFill>
+            <a:srgbClr val="D6DDE5"/>
+          </a:solidFill>
+          <a:ln>
+            <a:noFill/>
+          </a:ln>
+        </p:spPr>
+        <p:style>
+          <a:lnRef idx="1">
+            <a:schemeClr val="accent1"/>
+          </a:lnRef>
+          <a:fillRef idx="3">
+            <a:schemeClr val="accent1"/>
+          </a:fillRef>
+          <a:effectRef idx="2">
+            <a:schemeClr val="accent1"/>
+          </a:effectRef>
+          <a:fontRef idx="minor">
+            <a:schemeClr val="lt1"/>
+          </a:fontRef>
+        </p:style>
+        <p:txBody>
+          <a:bodyPr rtlCol="0" anchor="ctr"/>
+          <a:lstStyle/>
+          <a:p>
+            <a:pPr algn="ctr"/>
+          </a:p>
+        </p:txBody>
+      </p:sp>
+      <p:sp>
+        <p:nvSpPr>
+          <p:cNvPr id="9" name="TextBox 8"/>
+          <p:cNvSpPr txBox="1"/>
+          <p:nvPr/>
+        </p:nvSpPr>
+        <p:spPr>
+          <a:xfrm>
+            <a:off x="438912" y="6583680"/>
+            <a:ext cx="7315200" cy="237744"/>
+          </a:xfrm>
+          <a:prstGeom prst="rect">
+            <a:avLst/>
+          </a:prstGeom>
+          <a:noFill/>
+        </p:spPr>
+        <p:txBody>
+          <a:bodyPr wrap="square" lIns="18288" rIns="18288" tIns="18288" bIns="18288" anchor="ctr"/>
+          <a:lstStyle/>
+          <a:p>
+            <a:pPr algn="l">
+              <a:lnSpc>
+                <a:spcPct val="105000"/>
+              </a:lnSpc>
+              <a:spcBef>
+                <a:spcPts val="0"/>
+              </a:spcBef>
+              <a:spcAft>
+                <a:spcPts val="200"/>
+              </a:spcAft>
+            </a:pPr>
+            <a:r>
+              <a:rPr sz="1200" b="0">
+                <a:solidFill>
+                  <a:srgbClr val="58626E"/>
+                </a:solidFill>
+                <a:latin typeface="Microsoft YaHei"/>
+                <a:ea typeface="Microsoft YaHei"/>
+                <a:cs typeface="Microsoft YaHei"/>
+              </a:rPr>
+              <a:t>Decode KV 池</a:t>
+            </a:r>
+          </a:p>
+        </p:txBody>
+      </p:sp>
+      <p:sp>
+        <p:nvSpPr>
+          <p:cNvPr id="10" name="TextBox 9"/>
+          <p:cNvSpPr txBox="1"/>
+          <p:nvPr/>
+        </p:nvSpPr>
+        <p:spPr>
+          <a:xfrm>
+            <a:off x="10290047" y="6583680"/>
+            <a:ext cx="1463040" cy="237744"/>
+          </a:xfrm>
+          <a:prstGeom prst="rect">
+            <a:avLst/>
+          </a:prstGeom>
+          <a:noFill/>
+        </p:spPr>
+        <p:txBody>
+          <a:bodyPr wrap="square" lIns="18288" rIns="18288" tIns="18288" bIns="18288" anchor="ctr"/>
+          <a:lstStyle/>
+          <a:p>
+            <a:pPr algn="r">
+              <a:lnSpc>
+                <a:spcPct val="105000"/>
+              </a:lnSpc>
+              <a:spcBef>
+                <a:spcPts val="0"/>
+              </a:spcBef>
+              <a:spcAft>
+                <a:spcPts val="200"/>
+              </a:spcAft>
+            </a:pPr>
+            <a:r>
+              <a:rPr sz="1200" b="1">
+                <a:solidFill>
+                  <a:srgbClr val="0E4A8A"/>
+                </a:solidFill>
+                <a:latin typeface="Microsoft YaHei"/>
+                <a:ea typeface="Microsoft YaHei"/>
+                <a:cs typeface="Microsoft YaHei"/>
+              </a:rPr>
+              <a:t>4  /  4</a:t>
+            </a:r>
+          </a:p>
+        </p:txBody>
+      </p:sp>
+      <p:graphicFrame>
+        <p:nvGraphicFramePr>
+          <p:cNvPr id="11" name="Table 10"/>
+          <p:cNvGraphicFramePr>
+            <a:graphicFrameLocks noGrp="1"/>
+          </p:cNvGraphicFramePr>
+          <p:nvPr/>
+        </p:nvGraphicFramePr>
+        <p:xfrm>
+          <a:off x="438912" y="1682495"/>
+          <a:ext cx="11314175" cy="4764024"/>
+        </p:xfrm>
+        <a:graphic>
+          <a:graphicData uri="http://schemas.openxmlformats.org/drawingml/2006/table">
+            <a:tbl>
+              <a:tblPr firstRow="1" bandRow="1">
+                <a:tableStyleId>{5C22544A-7EE6-4342-B048-85BDC9FD1C3A}</a:tableStyleId>
+              </a:tblPr>
+              <a:tblGrid>
+                <a:gridCol w="5623560"/>
+                <a:gridCol w="1737360"/>
+                <a:gridCol w="3953255"/>
+              </a:tblGrid>
+              <a:tr h="595503">
+                <a:tc>
+                  <a:txBody>
+                    <a:bodyPr wrap="square"/>
+                    <a:lstStyle/>
+                    <a:p>
+                      <a:pPr algn="l"/>
+                      <a:r>
+                        <a:rPr sz="1400" b="1">
+                          <a:solidFill>
+                            <a:srgbClr val="FFFFFF"/>
+                          </a:solidFill>
+                          <a:latin typeface="Microsoft YaHei"/>
+                          <a:ea typeface="Microsoft YaHei"/>
+                          <a:cs typeface="Microsoft YaHei"/>
+                        </a:rPr>
+                        <a:t>场景</a:t>
+                      </a:r>
+                    </a:p>
+                  </a:txBody>
+                  <a:tcPr anchor="ctr">
+                    <a:solidFill>
+                      <a:srgbClr val="0E4A8A"/>
+                    </a:solidFill>
+                    <a:lnL w="6350">
+                      <a:solidFill>
+                        <a:srgbClr val="D6DCE2"/>
+                      </a:solidFill>
+                    </a:lnL>
+                    <a:lnR w="6350">
+                      <a:solidFill>
+                        <a:srgbClr val="D6DCE2"/>
+                      </a:solidFill>
+                    </a:lnR>
+                    <a:lnT w="6350">
+                      <a:solidFill>
+                        <a:srgbClr val="D6DCE2"/>
+                      </a:solidFill>
+                    </a:lnT>
+                    <a:lnB w="6350">
+                      <a:solidFill>
+                        <a:srgbClr val="D6DCE2"/>
+                      </a:solidFill>
+                    </a:lnB>
+                    <a:tcMar>
+                      <a:left mar="100000"/>
+                      <a:right mar="100000"/>
+                      <a:top mar="60000"/>
+                      <a:bottom mar="60000"/>
+                    </a:tcMar>
+                  </a:tcPr>
+                </a:tc>
+                <a:tc>
+                  <a:txBody>
+                    <a:bodyPr wrap="square"/>
+                    <a:lstStyle/>
+                    <a:p>
+                      <a:pPr algn="ctr"/>
+                      <a:r>
+                        <a:rPr sz="1400" b="1">
+                          <a:solidFill>
+                            <a:srgbClr val="FFFFFF"/>
+                          </a:solidFill>
+                          <a:latin typeface="Microsoft YaHei"/>
+                          <a:ea typeface="Microsoft YaHei"/>
+                          <a:cs typeface="Microsoft YaHei"/>
+                        </a:rPr>
+                        <a:t>选择</a:t>
+                      </a:r>
+                    </a:p>
+                  </a:txBody>
+                  <a:tcPr anchor="ctr">
+                    <a:solidFill>
+                      <a:srgbClr val="0E4A8A"/>
+                    </a:solidFill>
+                    <a:lnL w="6350">
+                      <a:solidFill>
+                        <a:srgbClr val="D6DCE2"/>
+                      </a:solidFill>
+                    </a:lnL>
+                    <a:lnR w="6350">
+                      <a:solidFill>
+                        <a:srgbClr val="D6DCE2"/>
+                      </a:solidFill>
+                    </a:lnR>
+                    <a:lnT w="6350">
+                      <a:solidFill>
+                        <a:srgbClr val="D6DCE2"/>
+                      </a:solidFill>
+                    </a:lnT>
+                    <a:lnB w="6350">
+                      <a:solidFill>
+                        <a:srgbClr val="D6DCE2"/>
+                      </a:solidFill>
+                    </a:lnB>
+                    <a:tcMar>
+                      <a:left mar="100000"/>
+                      <a:right mar="100000"/>
+                      <a:top mar="60000"/>
+                      <a:bottom mar="60000"/>
+                    </a:tcMar>
+                  </a:tcPr>
+                </a:tc>
+                <a:tc>
+                  <a:txBody>
+                    <a:bodyPr wrap="square"/>
+                    <a:lstStyle/>
+                    <a:p>
+                      <a:pPr algn="l"/>
+                      <a:r>
+                        <a:rPr sz="1400" b="1">
+                          <a:solidFill>
+                            <a:srgbClr val="FFFFFF"/>
+                          </a:solidFill>
+                          <a:latin typeface="Microsoft YaHei"/>
+                          <a:ea typeface="Microsoft YaHei"/>
+                          <a:cs typeface="Microsoft YaHei"/>
+                        </a:rPr>
+                        <a:t>原因</a:t>
+                      </a:r>
+                    </a:p>
+                  </a:txBody>
+                  <a:tcPr anchor="ctr">
+                    <a:solidFill>
+                      <a:srgbClr val="0E4A8A"/>
+                    </a:solidFill>
+                    <a:lnL w="6350">
+                      <a:solidFill>
+                        <a:srgbClr val="D6DCE2"/>
+                      </a:solidFill>
+                    </a:lnL>
+                    <a:lnR w="6350">
+                      <a:solidFill>
+                        <a:srgbClr val="D6DCE2"/>
+                      </a:solidFill>
+                    </a:lnR>
+                    <a:lnT w="6350">
+                      <a:solidFill>
+                        <a:srgbClr val="D6DCE2"/>
+                      </a:solidFill>
+                    </a:lnT>
+                    <a:lnB w="6350">
+                      <a:solidFill>
+                        <a:srgbClr val="D6DCE2"/>
+                      </a:solidFill>
+                    </a:lnB>
+                    <a:tcMar>
+                      <a:left mar="100000"/>
+                      <a:right mar="100000"/>
+                      <a:top mar="60000"/>
+                      <a:bottom mar="60000"/>
+                    </a:tcMar>
+                  </a:tcPr>
+                </a:tc>
+              </a:tr>
+              <a:tr h="595503">
+                <a:tc>
+                  <a:txBody>
+                    <a:bodyPr wrap="square"/>
+                    <a:lstStyle/>
+                    <a:p>
+                      <a:pPr algn="l"/>
+                      <a:r>
+                        <a:rPr sz="1400" b="0">
+                          <a:solidFill>
+                            <a:srgbClr val="161B22"/>
+                          </a:solidFill>
+                          <a:latin typeface="Microsoft YaHei"/>
+                          <a:ea typeface="Microsoft YaHei"/>
+                          <a:cs typeface="Microsoft YaHei"/>
+                        </a:rPr>
+                        <a:t>历史 KV 能整段留在 decode 侧 HBM</a:t>
+                      </a:r>
+                    </a:p>
+                  </a:txBody>
+                  <a:tcPr anchor="ctr">
+                    <a:solidFill>
+                      <a:srgbClr val="FFFFFF"/>
+                    </a:solidFill>
+                    <a:lnL w="6350">
+                      <a:solidFill>
+                        <a:srgbClr val="D6DCE2"/>
+                      </a:solidFill>
+                    </a:lnL>
+                    <a:lnR w="6350">
+                      <a:solidFill>
+                        <a:srgbClr val="D6DCE2"/>
+                      </a:solidFill>
+                    </a:lnR>
+                    <a:lnT w="6350">
+                      <a:solidFill>
+                        <a:srgbClr val="D6DCE2"/>
+                      </a:solidFill>
+                    </a:lnT>
+                    <a:lnB w="6350">
+                      <a:solidFill>
+                        <a:srgbClr val="D6DCE2"/>
+                      </a:solidFill>
+                    </a:lnB>
+                    <a:tcMar>
+                      <a:left mar="100000"/>
+                      <a:right mar="100000"/>
+                      <a:top mar="60000"/>
+                      <a:bottom mar="60000"/>
+                    </a:tcMar>
+                  </a:tcPr>
+                </a:tc>
+                <a:tc>
+                  <a:txBody>
+                    <a:bodyPr wrap="square"/>
+                    <a:lstStyle/>
+                    <a:p>
+                      <a:pPr algn="ctr"/>
+                      <a:r>
+                        <a:rPr sz="1400" b="1">
+                          <a:solidFill>
+                            <a:srgbClr val="606A76"/>
+                          </a:solidFill>
+                          <a:latin typeface="Microsoft YaHei"/>
+                          <a:ea typeface="Microsoft YaHei"/>
+                          <a:cs typeface="Microsoft YaHei"/>
+                        </a:rPr>
+                        <a:t>不进池</a:t>
+                      </a:r>
+                    </a:p>
+                  </a:txBody>
+                  <a:tcPr anchor="ctr">
+                    <a:solidFill>
+                      <a:srgbClr val="FFFFFF"/>
+                    </a:solidFill>
+                    <a:lnL w="6350">
+                      <a:solidFill>
+                        <a:srgbClr val="D6DCE2"/>
+                      </a:solidFill>
+                    </a:lnL>
+                    <a:lnR w="6350">
+                      <a:solidFill>
+                        <a:srgbClr val="D6DCE2"/>
+                      </a:solidFill>
+                    </a:lnR>
+                    <a:lnT w="6350">
+                      <a:solidFill>
+                        <a:srgbClr val="D6DCE2"/>
+                      </a:solidFill>
+                    </a:lnT>
+                    <a:lnB w="6350">
+                      <a:solidFill>
+                        <a:srgbClr val="D6DCE2"/>
+                      </a:solidFill>
+                    </a:lnB>
+                    <a:tcMar>
+                      <a:left mar="100000"/>
+                      <a:right mar="100000"/>
+                      <a:top mar="60000"/>
+                      <a:bottom mar="60000"/>
+                    </a:tcMar>
+                  </a:tcPr>
+                </a:tc>
+                <a:tc>
+                  <a:txBody>
+                    <a:bodyPr wrap="square"/>
+                    <a:lstStyle/>
+                    <a:p>
+                      <a:pPr algn="l"/>
+                      <a:r>
+                        <a:rPr sz="1400" b="0">
+                          <a:solidFill>
+                            <a:srgbClr val="58626E"/>
+                          </a:solidFill>
+                          <a:latin typeface="Microsoft YaHei"/>
+                          <a:ea typeface="Microsoft YaHei"/>
+                          <a:cs typeface="Microsoft YaHei"/>
+                        </a:rPr>
+                        <a:t>每步只读 HBM，池子不在 TPOT 上</a:t>
+                      </a:r>
+                    </a:p>
+                  </a:txBody>
+                  <a:tcPr anchor="ctr">
+                    <a:solidFill>
+                      <a:srgbClr val="FFFFFF"/>
+                    </a:solidFill>
+                    <a:lnL w="6350">
+                      <a:solidFill>
+                        <a:srgbClr val="D6DCE2"/>
+                      </a:solidFill>
+                    </a:lnL>
+                    <a:lnR w="6350">
+                      <a:solidFill>
+                        <a:srgbClr val="D6DCE2"/>
+                      </a:solidFill>
+                    </a:lnR>
+                    <a:lnT w="6350">
+                      <a:solidFill>
+                        <a:srgbClr val="D6DCE2"/>
+                      </a:solidFill>
+                    </a:lnT>
+                    <a:lnB w="6350">
+                      <a:solidFill>
+                        <a:srgbClr val="D6DCE2"/>
+                      </a:solidFill>
+                    </a:lnB>
+                    <a:tcMar>
+                      <a:left mar="100000"/>
+                      <a:right mar="100000"/>
+                      <a:top mar="60000"/>
+                      <a:bottom mar="60000"/>
+                    </a:tcMar>
+                  </a:tcPr>
+                </a:tc>
+              </a:tr>
+              <a:tr h="595503">
+                <a:tc>
+                  <a:txBody>
+                    <a:bodyPr wrap="square"/>
+                    <a:lstStyle/>
+                    <a:p>
+                      <a:pPr algn="l"/>
+                      <a:r>
+                        <a:rPr sz="1400" b="0">
+                          <a:solidFill>
+                            <a:srgbClr val="161B22"/>
+                          </a:solidFill>
+                          <a:latin typeface="Microsoft YaHei"/>
+                          <a:ea typeface="Microsoft YaHei"/>
+                          <a:cs typeface="Microsoft YaHei"/>
+                        </a:rPr>
+                        <a:t>冷前缀在第一个 token 之前装入 HBM</a:t>
+                      </a:r>
+                    </a:p>
+                  </a:txBody>
+                  <a:tcPr anchor="ctr">
+                    <a:solidFill>
+                      <a:srgbClr val="F4F7FA"/>
+                    </a:solidFill>
+                    <a:lnL w="6350">
+                      <a:solidFill>
+                        <a:srgbClr val="D6DCE2"/>
+                      </a:solidFill>
+                    </a:lnL>
+                    <a:lnR w="6350">
+                      <a:solidFill>
+                        <a:srgbClr val="D6DCE2"/>
+                      </a:solidFill>
+                    </a:lnR>
+                    <a:lnT w="6350">
+                      <a:solidFill>
+                        <a:srgbClr val="D6DCE2"/>
+                      </a:solidFill>
+                    </a:lnT>
+                    <a:lnB w="6350">
+                      <a:solidFill>
+                        <a:srgbClr val="D6DCE2"/>
+                      </a:solidFill>
+                    </a:lnB>
+                    <a:tcMar>
+                      <a:left mar="100000"/>
+                      <a:right mar="100000"/>
+                      <a:top mar="60000"/>
+                      <a:bottom mar="60000"/>
+                    </a:tcMar>
+                  </a:tcPr>
+                </a:tc>
+                <a:tc>
+                  <a:txBody>
+                    <a:bodyPr wrap="square"/>
+                    <a:lstStyle/>
+                    <a:p>
+                      <a:pPr algn="ctr"/>
+                      <a:r>
+                        <a:rPr sz="1400" b="1">
+                          <a:solidFill>
+                            <a:srgbClr val="0E4A8A"/>
+                          </a:solidFill>
+                          <a:latin typeface="Microsoft YaHei"/>
+                          <a:ea typeface="Microsoft YaHei"/>
+                          <a:cs typeface="Microsoft YaHei"/>
+                        </a:rPr>
+                        <a:t>SSD 可以</a:t>
+                      </a:r>
+                    </a:p>
+                  </a:txBody>
+                  <a:tcPr anchor="ctr">
+                    <a:solidFill>
+                      <a:srgbClr val="F4F7FA"/>
+                    </a:solidFill>
+                    <a:lnL w="6350">
+                      <a:solidFill>
+                        <a:srgbClr val="D6DCE2"/>
+                      </a:solidFill>
+                    </a:lnL>
+                    <a:lnR w="6350">
+                      <a:solidFill>
+                        <a:srgbClr val="D6DCE2"/>
+                      </a:solidFill>
+                    </a:lnR>
+                    <a:lnT w="6350">
+                      <a:solidFill>
+                        <a:srgbClr val="D6DCE2"/>
+                      </a:solidFill>
+                    </a:lnT>
+                    <a:lnB w="6350">
+                      <a:solidFill>
+                        <a:srgbClr val="D6DCE2"/>
+                      </a:solidFill>
+                    </a:lnB>
+                    <a:tcMar>
+                      <a:left mar="100000"/>
+                      <a:right mar="100000"/>
+                      <a:top mar="60000"/>
+                      <a:bottom mar="60000"/>
+                    </a:tcMar>
+                  </a:tcPr>
+                </a:tc>
+                <a:tc>
+                  <a:txBody>
+                    <a:bodyPr wrap="square"/>
+                    <a:lstStyle/>
+                    <a:p>
+                      <a:pPr algn="l"/>
+                      <a:r>
+                        <a:rPr sz="1400" b="0">
+                          <a:solidFill>
+                            <a:srgbClr val="58626E"/>
+                          </a:solidFill>
+                          <a:latin typeface="Microsoft YaHei"/>
+                          <a:ea typeface="Microsoft YaHei"/>
+                          <a:cs typeface="Microsoft YaHei"/>
+                        </a:rPr>
+                        <a:t>只搬一次，时间记在 TTFT</a:t>
+                      </a:r>
+                    </a:p>
+                  </a:txBody>
+                  <a:tcPr anchor="ctr">
+                    <a:solidFill>
+                      <a:srgbClr val="F4F7FA"/>
+                    </a:solidFill>
+                    <a:lnL w="6350">
+                      <a:solidFill>
+                        <a:srgbClr val="D6DCE2"/>
+                      </a:solidFill>
+                    </a:lnL>
+                    <a:lnR w="6350">
+                      <a:solidFill>
+                        <a:srgbClr val="D6DCE2"/>
+                      </a:solidFill>
+                    </a:lnR>
+                    <a:lnT w="6350">
+                      <a:solidFill>
+                        <a:srgbClr val="D6DCE2"/>
+                      </a:solidFill>
+                    </a:lnT>
+                    <a:lnB w="6350">
+                      <a:solidFill>
+                        <a:srgbClr val="D6DCE2"/>
+                      </a:solidFill>
+                    </a:lnB>
+                    <a:tcMar>
+                      <a:left mar="100000"/>
+                      <a:right mar="100000"/>
+                      <a:top mar="60000"/>
+                      <a:bottom mar="60000"/>
+                    </a:tcMar>
+                  </a:tcPr>
+                </a:tc>
+              </a:tr>
+              <a:tr h="595503">
+                <a:tc>
+                  <a:txBody>
+                    <a:bodyPr wrap="square"/>
+                    <a:lstStyle/>
+                    <a:p>
+                      <a:pPr algn="l"/>
+                      <a:r>
+                        <a:rPr sz="1400" b="0">
+                          <a:solidFill>
+                            <a:srgbClr val="161B22"/>
+                          </a:solidFill>
+                          <a:latin typeface="Microsoft YaHei"/>
+                          <a:ea typeface="Microsoft YaHei"/>
+                          <a:cs typeface="Microsoft YaHei"/>
+                        </a:rPr>
+                        <a:t>长上下文按层连续大读，合同看平均</a:t>
+                      </a:r>
+                    </a:p>
+                  </a:txBody>
+                  <a:tcPr anchor="ctr">
+                    <a:solidFill>
+                      <a:srgbClr val="FFFFFF"/>
+                    </a:solidFill>
+                    <a:lnL w="6350">
+                      <a:solidFill>
+                        <a:srgbClr val="D6DCE2"/>
+                      </a:solidFill>
+                    </a:lnL>
+                    <a:lnR w="6350">
+                      <a:solidFill>
+                        <a:srgbClr val="D6DCE2"/>
+                      </a:solidFill>
+                    </a:lnR>
+                    <a:lnT w="6350">
+                      <a:solidFill>
+                        <a:srgbClr val="D6DCE2"/>
+                      </a:solidFill>
+                    </a:lnT>
+                    <a:lnB w="6350">
+                      <a:solidFill>
+                        <a:srgbClr val="D6DCE2"/>
+                      </a:solidFill>
+                    </a:lnB>
+                    <a:tcMar>
+                      <a:left mar="100000"/>
+                      <a:right mar="100000"/>
+                      <a:top mar="60000"/>
+                      <a:bottom mar="60000"/>
+                    </a:tcMar>
+                  </a:tcPr>
+                </a:tc>
+                <a:tc>
+                  <a:txBody>
+                    <a:bodyPr wrap="square"/>
+                    <a:lstStyle/>
+                    <a:p>
+                      <a:pPr algn="ctr"/>
+                      <a:r>
+                        <a:rPr sz="1400" b="1">
+                          <a:solidFill>
+                            <a:srgbClr val="0E4A8A"/>
+                          </a:solidFill>
+                          <a:latin typeface="Microsoft YaHei"/>
+                          <a:ea typeface="Microsoft YaHei"/>
+                          <a:cs typeface="Microsoft YaHei"/>
+                        </a:rPr>
+                        <a:t>SSD 可以</a:t>
+                      </a:r>
+                    </a:p>
+                  </a:txBody>
+                  <a:tcPr anchor="ctr">
+                    <a:solidFill>
+                      <a:srgbClr val="FFFFFF"/>
+                    </a:solidFill>
+                    <a:lnL w="6350">
+                      <a:solidFill>
+                        <a:srgbClr val="D6DCE2"/>
+                      </a:solidFill>
+                    </a:lnL>
+                    <a:lnR w="6350">
+                      <a:solidFill>
+                        <a:srgbClr val="D6DCE2"/>
+                      </a:solidFill>
+                    </a:lnR>
+                    <a:lnT w="6350">
+                      <a:solidFill>
+                        <a:srgbClr val="D6DCE2"/>
+                      </a:solidFill>
+                    </a:lnT>
+                    <a:lnB w="6350">
+                      <a:solidFill>
+                        <a:srgbClr val="D6DCE2"/>
+                      </a:solidFill>
+                    </a:lnB>
+                    <a:tcMar>
+                      <a:left mar="100000"/>
+                      <a:right mar="100000"/>
+                      <a:top mar="60000"/>
+                      <a:bottom mar="60000"/>
+                    </a:tcMar>
+                  </a:tcPr>
+                </a:tc>
+                <a:tc>
+                  <a:txBody>
+                    <a:bodyPr wrap="square"/>
+                    <a:lstStyle/>
+                    <a:p>
+                      <a:pPr algn="l"/>
+                      <a:r>
+                        <a:rPr sz="1400" b="0">
+                          <a:solidFill>
+                            <a:srgbClr val="58626E"/>
+                          </a:solidFill>
+                          <a:latin typeface="Microsoft YaHei"/>
+                          <a:ea typeface="Microsoft YaHei"/>
+                          <a:cs typeface="Microsoft YaHei"/>
+                        </a:rPr>
+                        <a:t>接口被喂满，平均时间与 DDR 相同</a:t>
+                      </a:r>
+                    </a:p>
+                  </a:txBody>
+                  <a:tcPr anchor="ctr">
+                    <a:solidFill>
+                      <a:srgbClr val="FFFFFF"/>
+                    </a:solidFill>
+                    <a:lnL w="6350">
+                      <a:solidFill>
+                        <a:srgbClr val="D6DCE2"/>
+                      </a:solidFill>
+                    </a:lnL>
+                    <a:lnR w="6350">
+                      <a:solidFill>
+                        <a:srgbClr val="D6DCE2"/>
+                      </a:solidFill>
+                    </a:lnR>
+                    <a:lnT w="6350">
+                      <a:solidFill>
+                        <a:srgbClr val="D6DCE2"/>
+                      </a:solidFill>
+                    </a:lnT>
+                    <a:lnB w="6350">
+                      <a:solidFill>
+                        <a:srgbClr val="D6DCE2"/>
+                      </a:solidFill>
+                    </a:lnB>
+                    <a:tcMar>
+                      <a:left mar="100000"/>
+                      <a:right mar="100000"/>
+                      <a:top mar="60000"/>
+                      <a:bottom mar="60000"/>
+                    </a:tcMar>
+                  </a:tcPr>
+                </a:tc>
+              </a:tr>
+              <a:tr h="595503">
+                <a:tc>
+                  <a:txBody>
+                    <a:bodyPr wrap="square"/>
+                    <a:lstStyle/>
+                    <a:p>
+                      <a:pPr algn="l"/>
+                      <a:r>
+                        <a:rPr sz="1400" b="0">
+                          <a:solidFill>
+                            <a:srgbClr val="161B22"/>
+                          </a:solidFill>
+                          <a:latin typeface="Microsoft YaHei"/>
+                          <a:ea typeface="Microsoft YaHei"/>
+                          <a:cs typeface="Microsoft YaHei"/>
+                        </a:rPr>
+                        <a:t>离线吞吐，没有 TPOT 合同</a:t>
+                      </a:r>
+                    </a:p>
+                  </a:txBody>
+                  <a:tcPr anchor="ctr">
+                    <a:solidFill>
+                      <a:srgbClr val="F4F7FA"/>
+                    </a:solidFill>
+                    <a:lnL w="6350">
+                      <a:solidFill>
+                        <a:srgbClr val="D6DCE2"/>
+                      </a:solidFill>
+                    </a:lnL>
+                    <a:lnR w="6350">
+                      <a:solidFill>
+                        <a:srgbClr val="D6DCE2"/>
+                      </a:solidFill>
+                    </a:lnR>
+                    <a:lnT w="6350">
+                      <a:solidFill>
+                        <a:srgbClr val="D6DCE2"/>
+                      </a:solidFill>
+                    </a:lnT>
+                    <a:lnB w="6350">
+                      <a:solidFill>
+                        <a:srgbClr val="D6DCE2"/>
+                      </a:solidFill>
+                    </a:lnB>
+                    <a:tcMar>
+                      <a:left mar="100000"/>
+                      <a:right mar="100000"/>
+                      <a:top mar="60000"/>
+                      <a:bottom mar="60000"/>
+                    </a:tcMar>
+                  </a:tcPr>
+                </a:tc>
+                <a:tc>
+                  <a:txBody>
+                    <a:bodyPr wrap="square"/>
+                    <a:lstStyle/>
+                    <a:p>
+                      <a:pPr algn="ctr"/>
+                      <a:r>
+                        <a:rPr sz="1400" b="1">
+                          <a:solidFill>
+                            <a:srgbClr val="0E4A8A"/>
+                          </a:solidFill>
+                          <a:latin typeface="Microsoft YaHei"/>
+                          <a:ea typeface="Microsoft YaHei"/>
+                          <a:cs typeface="Microsoft YaHei"/>
+                        </a:rPr>
+                        <a:t>SSD 可以</a:t>
+                      </a:r>
+                    </a:p>
+                  </a:txBody>
+                  <a:tcPr anchor="ctr">
+                    <a:solidFill>
+                      <a:srgbClr val="F4F7FA"/>
+                    </a:solidFill>
+                    <a:lnL w="6350">
+                      <a:solidFill>
+                        <a:srgbClr val="D6DCE2"/>
+                      </a:solidFill>
+                    </a:lnL>
+                    <a:lnR w="6350">
+                      <a:solidFill>
+                        <a:srgbClr val="D6DCE2"/>
+                      </a:solidFill>
+                    </a:lnR>
+                    <a:lnT w="6350">
+                      <a:solidFill>
+                        <a:srgbClr val="D6DCE2"/>
+                      </a:solidFill>
+                    </a:lnT>
+                    <a:lnB w="6350">
+                      <a:solidFill>
+                        <a:srgbClr val="D6DCE2"/>
+                      </a:solidFill>
+                    </a:lnB>
+                    <a:tcMar>
+                      <a:left mar="100000"/>
+                      <a:right mar="100000"/>
+                      <a:top mar="60000"/>
+                      <a:bottom mar="60000"/>
+                    </a:tcMar>
+                  </a:tcPr>
+                </a:tc>
+                <a:tc>
+                  <a:txBody>
+                    <a:bodyPr wrap="square"/>
+                    <a:lstStyle/>
+                    <a:p>
+                      <a:pPr algn="l"/>
+                      <a:r>
+                        <a:rPr sz="1400" b="0">
+                          <a:solidFill>
+                            <a:srgbClr val="58626E"/>
+                          </a:solidFill>
+                          <a:latin typeface="Microsoft YaHei"/>
+                          <a:ea typeface="Microsoft YaHei"/>
+                          <a:cs typeface="Microsoft YaHei"/>
+                        </a:rPr>
+                        <a:t>时延和垃圾回收长尾不进预算</a:t>
+                      </a:r>
+                    </a:p>
+                  </a:txBody>
+                  <a:tcPr anchor="ctr">
+                    <a:solidFill>
+                      <a:srgbClr val="F4F7FA"/>
+                    </a:solidFill>
+                    <a:lnL w="6350">
+                      <a:solidFill>
+                        <a:srgbClr val="D6DCE2"/>
+                      </a:solidFill>
+                    </a:lnL>
+                    <a:lnR w="6350">
+                      <a:solidFill>
+                        <a:srgbClr val="D6DCE2"/>
+                      </a:solidFill>
+                    </a:lnR>
+                    <a:lnT w="6350">
+                      <a:solidFill>
+                        <a:srgbClr val="D6DCE2"/>
+                      </a:solidFill>
+                    </a:lnT>
+                    <a:lnB w="6350">
+                      <a:solidFill>
+                        <a:srgbClr val="D6DCE2"/>
+                      </a:solidFill>
+                    </a:lnB>
+                    <a:tcMar>
+                      <a:left mar="100000"/>
+                      <a:right mar="100000"/>
+                      <a:top mar="60000"/>
+                      <a:bottom mar="60000"/>
+                    </a:tcMar>
+                  </a:tcPr>
+                </a:tc>
+              </a:tr>
+              <a:tr h="595503">
+                <a:tc>
+                  <a:txBody>
+                    <a:bodyPr wrap="square"/>
+                    <a:lstStyle/>
+                    <a:p>
+                      <a:pPr algn="l"/>
+                      <a:r>
+                        <a:rPr sz="1400" b="0">
+                          <a:solidFill>
+                            <a:srgbClr val="161B22"/>
+                          </a:solidFill>
+                          <a:latin typeface="Microsoft YaHei"/>
+                          <a:ea typeface="Microsoft YaHei"/>
+                          <a:cs typeface="Microsoft YaHei"/>
+                        </a:rPr>
+                        <a:t>小页随机读，上下文变长则 IO 次数上升</a:t>
+                      </a:r>
+                    </a:p>
+                  </a:txBody>
+                  <a:tcPr anchor="ctr">
+                    <a:solidFill>
+                      <a:srgbClr val="FFFFFF"/>
+                    </a:solidFill>
+                    <a:lnL w="6350">
+                      <a:solidFill>
+                        <a:srgbClr val="D6DCE2"/>
+                      </a:solidFill>
+                    </a:lnL>
+                    <a:lnR w="6350">
+                      <a:solidFill>
+                        <a:srgbClr val="D6DCE2"/>
+                      </a:solidFill>
+                    </a:lnR>
+                    <a:lnT w="6350">
+                      <a:solidFill>
+                        <a:srgbClr val="D6DCE2"/>
+                      </a:solidFill>
+                    </a:lnT>
+                    <a:lnB w="6350">
+                      <a:solidFill>
+                        <a:srgbClr val="D6DCE2"/>
+                      </a:solidFill>
+                    </a:lnB>
+                    <a:tcMar>
+                      <a:left mar="100000"/>
+                      <a:right mar="100000"/>
+                      <a:top mar="60000"/>
+                      <a:bottom mar="60000"/>
+                    </a:tcMar>
+                  </a:tcPr>
+                </a:tc>
+                <a:tc>
+                  <a:txBody>
+                    <a:bodyPr wrap="square"/>
+                    <a:lstStyle/>
+                    <a:p>
+                      <a:pPr algn="ctr"/>
+                      <a:r>
+                        <a:rPr sz="1400" b="1">
+                          <a:solidFill>
+                            <a:srgbClr val="8C2A24"/>
+                          </a:solidFill>
+                          <a:latin typeface="Microsoft YaHei"/>
+                          <a:ea typeface="Microsoft YaHei"/>
+                          <a:cs typeface="Microsoft YaHei"/>
+                        </a:rPr>
+                        <a:t>必须 DDR</a:t>
+                      </a:r>
+                    </a:p>
+                  </a:txBody>
+                  <a:tcPr anchor="ctr">
+                    <a:solidFill>
+                      <a:srgbClr val="FFFFFF"/>
+                    </a:solidFill>
+                    <a:lnL w="6350">
+                      <a:solidFill>
+                        <a:srgbClr val="D6DCE2"/>
+                      </a:solidFill>
+                    </a:lnL>
+                    <a:lnR w="6350">
+                      <a:solidFill>
+                        <a:srgbClr val="D6DCE2"/>
+                      </a:solidFill>
+                    </a:lnR>
+                    <a:lnT w="6350">
+                      <a:solidFill>
+                        <a:srgbClr val="D6DCE2"/>
+                      </a:solidFill>
+                    </a:lnT>
+                    <a:lnB w="6350">
+                      <a:solidFill>
+                        <a:srgbClr val="D6DCE2"/>
+                      </a:solidFill>
+                    </a:lnB>
+                    <a:tcMar>
+                      <a:left mar="100000"/>
+                      <a:right mar="100000"/>
+                      <a:top mar="60000"/>
+                      <a:bottom mar="60000"/>
+                    </a:tcMar>
+                  </a:tcPr>
+                </a:tc>
+                <a:tc>
+                  <a:txBody>
+                    <a:bodyPr wrap="square"/>
+                    <a:lstStyle/>
+                    <a:p>
+                      <a:pPr algn="l"/>
+                      <a:r>
+                        <a:rPr sz="1400" b="0">
+                          <a:solidFill>
+                            <a:srgbClr val="58626E"/>
+                          </a:solidFill>
+                          <a:latin typeface="Microsoft YaHei"/>
+                          <a:ea typeface="Microsoft YaHei"/>
+                          <a:cs typeface="Microsoft YaHei"/>
+                        </a:rPr>
+                        <a:t>SSD 喂不满同一条接口</a:t>
+                      </a:r>
+                    </a:p>
+                  </a:txBody>
+                  <a:tcPr anchor="ctr">
+                    <a:solidFill>
+                      <a:srgbClr val="FFFFFF"/>
+                    </a:solidFill>
+                    <a:lnL w="6350">
+                      <a:solidFill>
+                        <a:srgbClr val="D6DCE2"/>
+                      </a:solidFill>
+                    </a:lnL>
+                    <a:lnR w="6350">
+                      <a:solidFill>
+                        <a:srgbClr val="D6DCE2"/>
+                      </a:solidFill>
+                    </a:lnR>
+                    <a:lnT w="6350">
+                      <a:solidFill>
+                        <a:srgbClr val="D6DCE2"/>
+                      </a:solidFill>
+                    </a:lnT>
+                    <a:lnB w="6350">
+                      <a:solidFill>
+                        <a:srgbClr val="D6DCE2"/>
+                      </a:solidFill>
+                    </a:lnB>
+                    <a:tcMar>
+                      <a:left mar="100000"/>
+                      <a:right mar="100000"/>
+                      <a:top mar="60000"/>
+                      <a:bottom mar="60000"/>
+                    </a:tcMar>
+                  </a:tcPr>
+                </a:tc>
+              </a:tr>
+              <a:tr h="595503">
+                <a:tc>
+                  <a:txBody>
+                    <a:bodyPr wrap="square"/>
+                    <a:lstStyle/>
+                    <a:p>
+                      <a:pPr algn="l"/>
+                      <a:r>
+                        <a:rPr sz="1400" b="0">
+                          <a:solidFill>
+                            <a:srgbClr val="161B22"/>
+                          </a:solidFill>
+                          <a:latin typeface="Microsoft YaHei"/>
+                          <a:ea typeface="Microsoft YaHei"/>
+                          <a:cs typeface="Microsoft YaHei"/>
+                        </a:rPr>
+                        <a:t>合同写的是 p99 TPOT</a:t>
+                      </a:r>
+                    </a:p>
+                  </a:txBody>
+                  <a:tcPr anchor="ctr">
+                    <a:solidFill>
+                      <a:srgbClr val="F4F7FA"/>
+                    </a:solidFill>
+                    <a:lnL w="6350">
+                      <a:solidFill>
+                        <a:srgbClr val="D6DCE2"/>
+                      </a:solidFill>
+                    </a:lnL>
+                    <a:lnR w="6350">
+                      <a:solidFill>
+                        <a:srgbClr val="D6DCE2"/>
+                      </a:solidFill>
+                    </a:lnR>
+                    <a:lnT w="6350">
+                      <a:solidFill>
+                        <a:srgbClr val="D6DCE2"/>
+                      </a:solidFill>
+                    </a:lnT>
+                    <a:lnB w="6350">
+                      <a:solidFill>
+                        <a:srgbClr val="D6DCE2"/>
+                      </a:solidFill>
+                    </a:lnB>
+                    <a:tcMar>
+                      <a:left mar="100000"/>
+                      <a:right mar="100000"/>
+                      <a:top mar="60000"/>
+                      <a:bottom mar="60000"/>
+                    </a:tcMar>
+                  </a:tcPr>
+                </a:tc>
+                <a:tc>
+                  <a:txBody>
+                    <a:bodyPr wrap="square"/>
+                    <a:lstStyle/>
+                    <a:p>
+                      <a:pPr algn="ctr"/>
+                      <a:r>
+                        <a:rPr sz="1400" b="1">
+                          <a:solidFill>
+                            <a:srgbClr val="8C2A24"/>
+                          </a:solidFill>
+                          <a:latin typeface="Microsoft YaHei"/>
+                          <a:ea typeface="Microsoft YaHei"/>
+                          <a:cs typeface="Microsoft YaHei"/>
+                        </a:rPr>
+                        <a:t>必须 DDR</a:t>
+                      </a:r>
+                    </a:p>
+                  </a:txBody>
+                  <a:tcPr anchor="ctr">
+                    <a:solidFill>
+                      <a:srgbClr val="F4F7FA"/>
+                    </a:solidFill>
+                    <a:lnL w="6350">
+                      <a:solidFill>
+                        <a:srgbClr val="D6DCE2"/>
+                      </a:solidFill>
+                    </a:lnL>
+                    <a:lnR w="6350">
+                      <a:solidFill>
+                        <a:srgbClr val="D6DCE2"/>
+                      </a:solidFill>
+                    </a:lnR>
+                    <a:lnT w="6350">
+                      <a:solidFill>
+                        <a:srgbClr val="D6DCE2"/>
+                      </a:solidFill>
+                    </a:lnT>
+                    <a:lnB w="6350">
+                      <a:solidFill>
+                        <a:srgbClr val="D6DCE2"/>
+                      </a:solidFill>
+                    </a:lnB>
+                    <a:tcMar>
+                      <a:left mar="100000"/>
+                      <a:right mar="100000"/>
+                      <a:top mar="60000"/>
+                      <a:bottom mar="60000"/>
+                    </a:tcMar>
+                  </a:tcPr>
+                </a:tc>
+                <a:tc>
+                  <a:txBody>
+                    <a:bodyPr wrap="square"/>
+                    <a:lstStyle/>
+                    <a:p>
+                      <a:pPr algn="l"/>
+                      <a:r>
+                        <a:rPr sz="1400" b="0">
+                          <a:solidFill>
+                            <a:srgbClr val="58626E"/>
+                          </a:solidFill>
+                          <a:latin typeface="Microsoft YaHei"/>
+                          <a:ea typeface="Microsoft YaHei"/>
+                          <a:cs typeface="Microsoft YaHei"/>
+                        </a:rPr>
+                        <a:t>垃圾回收的停顿不随大流量摊薄</a:t>
+                      </a:r>
+                    </a:p>
+                  </a:txBody>
+                  <a:tcPr anchor="ctr">
+                    <a:solidFill>
+                      <a:srgbClr val="F4F7FA"/>
+                    </a:solidFill>
+                    <a:lnL w="6350">
+                      <a:solidFill>
+                        <a:srgbClr val="D6DCE2"/>
+                      </a:solidFill>
+                    </a:lnL>
+                    <a:lnR w="6350">
+                      <a:solidFill>
+                        <a:srgbClr val="D6DCE2"/>
+                      </a:solidFill>
+                    </a:lnR>
+                    <a:lnT w="6350">
+                      <a:solidFill>
+                        <a:srgbClr val="D6DCE2"/>
+                      </a:solidFill>
+                    </a:lnT>
+                    <a:lnB w="6350">
+                      <a:solidFill>
+                        <a:srgbClr val="D6DCE2"/>
+                      </a:solidFill>
+                    </a:lnB>
+                    <a:tcMar>
+                      <a:left mar="100000"/>
+                      <a:right mar="100000"/>
+                      <a:top mar="60000"/>
+                      <a:bottom mar="60000"/>
+                    </a:tcMar>
+                  </a:tcPr>
+                </a:tc>
+              </a:tr>
+              <a:tr h="595503">
+                <a:tc>
+                  <a:txBody>
+                    <a:bodyPr wrap="square"/>
+                    <a:lstStyle/>
+                    <a:p>
+                      <a:pPr algn="l"/>
+                      <a:r>
+                        <a:rPr sz="1400" b="0">
+                          <a:solidFill>
+                            <a:srgbClr val="161B22"/>
+                          </a:solidFill>
+                          <a:latin typeface="Microsoft YaHei"/>
+                          <a:ea typeface="Microsoft YaHei"/>
+                          <a:cs typeface="Microsoft YaHei"/>
+                        </a:rPr>
+                        <a:t>单次 IO 太小，时延差大于剩余预算</a:t>
+                      </a:r>
+                    </a:p>
+                  </a:txBody>
+                  <a:tcPr anchor="ctr">
+                    <a:solidFill>
+                      <a:srgbClr val="FFFFFF"/>
+                    </a:solidFill>
+                    <a:lnL w="6350">
+                      <a:solidFill>
+                        <a:srgbClr val="D6DCE2"/>
+                      </a:solidFill>
+                    </a:lnL>
+                    <a:lnR w="6350">
+                      <a:solidFill>
+                        <a:srgbClr val="D6DCE2"/>
+                      </a:solidFill>
+                    </a:lnR>
+                    <a:lnT w="6350">
+                      <a:solidFill>
+                        <a:srgbClr val="D6DCE2"/>
+                      </a:solidFill>
+                    </a:lnT>
+                    <a:lnB w="6350">
+                      <a:solidFill>
+                        <a:srgbClr val="D6DCE2"/>
+                      </a:solidFill>
+                    </a:lnB>
+                    <a:tcMar>
+                      <a:left mar="100000"/>
+                      <a:right mar="100000"/>
+                      <a:top mar="60000"/>
+                      <a:bottom mar="60000"/>
+                    </a:tcMar>
+                  </a:tcPr>
+                </a:tc>
+                <a:tc>
+                  <a:txBody>
+                    <a:bodyPr wrap="square"/>
+                    <a:lstStyle/>
+                    <a:p>
+                      <a:pPr algn="ctr"/>
+                      <a:r>
+                        <a:rPr sz="1400" b="1">
+                          <a:solidFill>
+                            <a:srgbClr val="8C2A24"/>
+                          </a:solidFill>
+                          <a:latin typeface="Microsoft YaHei"/>
+                          <a:ea typeface="Microsoft YaHei"/>
+                          <a:cs typeface="Microsoft YaHei"/>
+                        </a:rPr>
+                        <a:t>必须 DDR</a:t>
+                      </a:r>
+                    </a:p>
+                  </a:txBody>
+                  <a:tcPr anchor="ctr">
+                    <a:solidFill>
+                      <a:srgbClr val="FFFFFF"/>
+                    </a:solidFill>
+                    <a:lnL w="6350">
+                      <a:solidFill>
+                        <a:srgbClr val="D6DCE2"/>
+                      </a:solidFill>
+                    </a:lnL>
+                    <a:lnR w="6350">
+                      <a:solidFill>
+                        <a:srgbClr val="D6DCE2"/>
+                      </a:solidFill>
+                    </a:lnR>
+                    <a:lnT w="6350">
+                      <a:solidFill>
+                        <a:srgbClr val="D6DCE2"/>
+                      </a:solidFill>
+                    </a:lnT>
+                    <a:lnB w="6350">
+                      <a:solidFill>
+                        <a:srgbClr val="D6DCE2"/>
+                      </a:solidFill>
+                    </a:lnB>
+                    <a:tcMar>
+                      <a:left mar="100000"/>
+                      <a:right mar="100000"/>
+                      <a:top mar="60000"/>
+                      <a:bottom mar="60000"/>
+                    </a:tcMar>
+                  </a:tcPr>
+                </a:tc>
+                <a:tc>
+                  <a:txBody>
+                    <a:bodyPr wrap="square"/>
+                    <a:lstStyle/>
+                    <a:p>
+                      <a:pPr algn="l"/>
+                      <a:r>
+                        <a:rPr sz="1400" b="0">
+                          <a:solidFill>
+                            <a:srgbClr val="58626E"/>
+                          </a:solidFill>
+                          <a:latin typeface="Microsoft YaHei"/>
+                          <a:ea typeface="Microsoft YaHei"/>
+                          <a:cs typeface="Microsoft YaHei"/>
+                        </a:rPr>
+                        <a:t>介质时延直接加进每一个 token</a:t>
+                      </a:r>
+                    </a:p>
+                  </a:txBody>
+                  <a:tcPr anchor="ctr">
+                    <a:solidFill>
+                      <a:srgbClr val="FFFFFF"/>
+                    </a:solidFill>
+                    <a:lnL w="6350">
+                      <a:solidFill>
+                        <a:srgbClr val="D6DCE2"/>
+                      </a:solidFill>
+                    </a:lnL>
+                    <a:lnR w="6350">
+                      <a:solidFill>
+                        <a:srgbClr val="D6DCE2"/>
+                      </a:solidFill>
+                    </a:lnR>
+                    <a:lnT w="6350">
+                      <a:solidFill>
+                        <a:srgbClr val="D6DCE2"/>
+                      </a:solidFill>
+                    </a:lnT>
+                    <a:lnB w="6350">
+                      <a:solidFill>
+                        <a:srgbClr val="D6DCE2"/>
+                      </a:solidFill>
+                    </a:lnB>
+                    <a:tcMar>
+                      <a:left mar="100000"/>
+                      <a:right mar="100000"/>
+                      <a:top mar="60000"/>
+                      <a:bottom mar="60000"/>
+                    </a:tcMar>
+                  </a:tcPr>
+                </a:tc>
+              </a:tr>
+            </a:tbl>
+          </a:graphicData>
+        </a:graphic>
+      </p:graphicFrame>
     </p:spTree>
   </p:cSld>
   <p:clrMapOvr>
